--- a/LC UNIX/11 Introduction to Shell Scripting.pptx
+++ b/LC UNIX/11 Introduction to Shell Scripting.pptx
@@ -26,8 +26,8 @@
     <p:sldId id="267" r:id="rId14"/>
     <p:sldId id="268" r:id="rId15"/>
     <p:sldId id="269" r:id="rId16"/>
-    <p:sldId id="270" r:id="rId17"/>
-    <p:sldId id="271" r:id="rId18"/>
+    <p:sldId id="271" r:id="rId17"/>
+    <p:sldId id="270" r:id="rId18"/>
     <p:sldId id="272" r:id="rId19"/>
     <p:sldId id="273" r:id="rId20"/>
     <p:sldId id="274" r:id="rId21"/>
@@ -153,93 +153,51 @@
 </p:presentation>
 </file>
 
-<file path=ppt/revisionInfo.xml><?xml version="1.0" encoding="utf-8"?>
-<p1510:revInfo xmlns:a="http://schemas.openxmlformats.org/drawingml/2006/main" xmlns:r="http://schemas.openxmlformats.org/officeDocument/2006/relationships" xmlns:p1510="http://schemas.microsoft.com/office/powerpoint/2015/10/main">
-  <p1510:revLst>
-    <p1510:client id="{6B3ABACD-2B17-FC42-A9EE-4360F282BF3D}" v="1" dt="2025-10-28T10:46:56.427"/>
-  </p1510:revLst>
-</p1510:revInfo>
-</file>
-
 <file path=ppt/changesInfos/changesInfo1.xml><?xml version="1.0" encoding="utf-8"?>
 <pc:chgInfo xmlns:a="http://schemas.openxmlformats.org/drawingml/2006/main" xmlns:r="http://schemas.openxmlformats.org/officeDocument/2006/relationships" xmlns:ac="http://schemas.microsoft.com/office/drawing/2013/main/command" xmlns:pc="http://schemas.microsoft.com/office/powerpoint/2013/main/command">
   <pc:docChgLst>
-    <pc:chgData name="Baráth, Július" userId="S::julius.barath@aos.sk::aebde9b9-dccc-4475-a9ac-c05e78323d7a" providerId="AD" clId="Web-{6211EA97-7412-CC63-1977-41AD100B6E87}"/>
-    <pc:docChg chg="modSld">
-      <pc:chgData name="Baráth, Július" userId="S::julius.barath@aos.sk::aebde9b9-dccc-4475-a9ac-c05e78323d7a" providerId="AD" clId="Web-{6211EA97-7412-CC63-1977-41AD100B6E87}" dt="2025-10-27T07:13:04.758" v="36" actId="20577"/>
-      <pc:docMkLst>
-        <pc:docMk/>
-      </pc:docMkLst>
-      <pc:sldChg chg="modSp">
-        <pc:chgData name="Baráth, Július" userId="S::julius.barath@aos.sk::aebde9b9-dccc-4475-a9ac-c05e78323d7a" providerId="AD" clId="Web-{6211EA97-7412-CC63-1977-41AD100B6E87}" dt="2025-10-27T07:13:04.758" v="36" actId="20577"/>
-        <pc:sldMkLst>
-          <pc:docMk/>
-          <pc:sldMk cId="0" sldId="280"/>
-        </pc:sldMkLst>
-        <pc:spChg chg="mod">
-          <ac:chgData name="Baráth, Július" userId="S::julius.barath@aos.sk::aebde9b9-dccc-4475-a9ac-c05e78323d7a" providerId="AD" clId="Web-{6211EA97-7412-CC63-1977-41AD100B6E87}" dt="2025-10-27T07:13:04.758" v="36" actId="20577"/>
-          <ac:spMkLst>
-            <pc:docMk/>
-            <pc:sldMk cId="0" sldId="280"/>
-            <ac:spMk id="37" creationId="{00000000-0000-0000-0000-000000000000}"/>
-          </ac:spMkLst>
-        </pc:spChg>
-      </pc:sldChg>
-    </pc:docChg>
-  </pc:docChgLst>
-  <pc:docChgLst>
     <pc:chgData name="Baráth, Július" userId="aebde9b9-dccc-4475-a9ac-c05e78323d7a" providerId="ADAL" clId="{4A0811C8-ED2F-505E-B787-C8270CED5046}"/>
-    <pc:docChg chg="modSld">
-      <pc:chgData name="Baráth, Július" userId="aebde9b9-dccc-4475-a9ac-c05e78323d7a" providerId="ADAL" clId="{4A0811C8-ED2F-505E-B787-C8270CED5046}" dt="2025-10-28T10:47:04.609" v="1" actId="404"/>
+    <pc:docChg chg="modSld sldOrd">
+      <pc:chgData name="Baráth, Július" userId="aebde9b9-dccc-4475-a9ac-c05e78323d7a" providerId="ADAL" clId="{4A0811C8-ED2F-505E-B787-C8270CED5046}" dt="2026-03-13T11:58:02.288" v="5" actId="20578"/>
       <pc:docMkLst>
         <pc:docMk/>
       </pc:docMkLst>
       <pc:sldChg chg="modSp mod">
-        <pc:chgData name="Baráth, Július" userId="aebde9b9-dccc-4475-a9ac-c05e78323d7a" providerId="ADAL" clId="{4A0811C8-ED2F-505E-B787-C8270CED5046}" dt="2025-10-28T10:47:04.609" v="1" actId="404"/>
+        <pc:chgData name="Baráth, Július" userId="aebde9b9-dccc-4475-a9ac-c05e78323d7a" providerId="ADAL" clId="{4A0811C8-ED2F-505E-B787-C8270CED5046}" dt="2026-03-13T11:01:23.861" v="2" actId="6549"/>
         <pc:sldMkLst>
           <pc:docMk/>
-          <pc:sldMk cId="0" sldId="280"/>
+          <pc:sldMk cId="0" sldId="261"/>
         </pc:sldMkLst>
         <pc:spChg chg="mod">
-          <ac:chgData name="Baráth, Július" userId="aebde9b9-dccc-4475-a9ac-c05e78323d7a" providerId="ADAL" clId="{4A0811C8-ED2F-505E-B787-C8270CED5046}" dt="2025-10-28T10:47:04.609" v="1" actId="404"/>
+          <ac:chgData name="Baráth, Július" userId="aebde9b9-dccc-4475-a9ac-c05e78323d7a" providerId="ADAL" clId="{4A0811C8-ED2F-505E-B787-C8270CED5046}" dt="2026-03-13T11:01:23.861" v="2" actId="6549"/>
           <ac:spMkLst>
             <pc:docMk/>
-            <pc:sldMk cId="0" sldId="280"/>
-            <ac:spMk id="37" creationId="{00000000-0000-0000-0000-000000000000}"/>
+            <pc:sldMk cId="0" sldId="261"/>
+            <ac:spMk id="3" creationId="{00000000-0000-0000-0000-000000000000}"/>
           </ac:spMkLst>
         </pc:spChg>
       </pc:sldChg>
-    </pc:docChg>
-  </pc:docChgLst>
-  <pc:docChgLst>
-    <pc:chgData name="Baráth, Július" userId="S::julius.barath@aos.sk::aebde9b9-dccc-4475-a9ac-c05e78323d7a" providerId="AD" clId="Web-{5D5B40B2-FB67-8F11-A8AB-D5FE6D694272}"/>
-    <pc:docChg chg="modSld">
-      <pc:chgData name="Baráth, Július" userId="S::julius.barath@aos.sk::aebde9b9-dccc-4475-a9ac-c05e78323d7a" providerId="AD" clId="Web-{5D5B40B2-FB67-8F11-A8AB-D5FE6D694272}" dt="2025-10-24T15:43:19.737" v="39" actId="20577"/>
-      <pc:docMkLst>
-        <pc:docMk/>
-      </pc:docMkLst>
-      <pc:sldChg chg="modSp">
-        <pc:chgData name="Baráth, Július" userId="S::julius.barath@aos.sk::aebde9b9-dccc-4475-a9ac-c05e78323d7a" providerId="AD" clId="Web-{5D5B40B2-FB67-8F11-A8AB-D5FE6D694272}" dt="2025-10-24T15:43:19.737" v="39" actId="20577"/>
+      <pc:sldChg chg="modSp mod">
+        <pc:chgData name="Baráth, Július" userId="aebde9b9-dccc-4475-a9ac-c05e78323d7a" providerId="ADAL" clId="{4A0811C8-ED2F-505E-B787-C8270CED5046}" dt="2026-03-13T11:34:13.335" v="4" actId="20577"/>
         <pc:sldMkLst>
           <pc:docMk/>
-          <pc:sldMk cId="0" sldId="280"/>
+          <pc:sldMk cId="0" sldId="266"/>
         </pc:sldMkLst>
         <pc:spChg chg="mod">
-          <ac:chgData name="Baráth, Július" userId="S::julius.barath@aos.sk::aebde9b9-dccc-4475-a9ac-c05e78323d7a" providerId="AD" clId="Web-{5D5B40B2-FB67-8F11-A8AB-D5FE6D694272}" dt="2025-10-24T15:43:19.737" v="39" actId="20577"/>
+          <ac:chgData name="Baráth, Július" userId="aebde9b9-dccc-4475-a9ac-c05e78323d7a" providerId="ADAL" clId="{4A0811C8-ED2F-505E-B787-C8270CED5046}" dt="2026-03-13T11:34:13.335" v="4" actId="20577"/>
           <ac:spMkLst>
             <pc:docMk/>
-            <pc:sldMk cId="0" sldId="280"/>
-            <ac:spMk id="37" creationId="{00000000-0000-0000-0000-000000000000}"/>
+            <pc:sldMk cId="0" sldId="266"/>
+            <ac:spMk id="3" creationId="{00000000-0000-0000-0000-000000000000}"/>
           </ac:spMkLst>
         </pc:spChg>
-        <pc:spChg chg="mod">
-          <ac:chgData name="Baráth, Július" userId="S::julius.barath@aos.sk::aebde9b9-dccc-4475-a9ac-c05e78323d7a" providerId="AD" clId="Web-{5D5B40B2-FB67-8F11-A8AB-D5FE6D694272}" dt="2025-10-24T15:43:10.534" v="36" actId="20577"/>
-          <ac:spMkLst>
-            <pc:docMk/>
-            <pc:sldMk cId="0" sldId="280"/>
-            <ac:spMk id="38" creationId="{00000000-0000-0000-0000-000000000000}"/>
-          </ac:spMkLst>
-        </pc:spChg>
+      </pc:sldChg>
+      <pc:sldChg chg="ord">
+        <pc:chgData name="Baráth, Július" userId="aebde9b9-dccc-4475-a9ac-c05e78323d7a" providerId="ADAL" clId="{4A0811C8-ED2F-505E-B787-C8270CED5046}" dt="2026-03-13T11:58:02.288" v="5" actId="20578"/>
+        <pc:sldMkLst>
+          <pc:docMk/>
+          <pc:sldMk cId="0" sldId="271"/>
+        </pc:sldMkLst>
       </pc:sldChg>
     </pc:docChg>
   </pc:docChgLst>
@@ -447,7 +405,7 @@
                 <a:buNone/>
                 <a:defRPr sz="1400"/>
               </a:pPr>
-              <a:t>28.10.2025</a:t>
+              <a:t>13.3.2026</a:t>
             </a:fld>
             <a:endParaRPr lang="sk-SK" sz="1200">
               <a:latin typeface="Liberation Sans" pitchFamily="18"/>
@@ -817,7 +775,7 @@
             <a:fld id="{C7357164-0B51-4B11-8CF0-0ED60DF74312}" type="datetimeFigureOut">
               <a:rPr lang="sk-SK"/>
               <a:pPr lvl="0"/>
-              <a:t>28.10.2025</a:t>
+              <a:t>13.3.2026</a:t>
             </a:fld>
             <a:endParaRPr lang="sk-SK"/>
           </a:p>
@@ -1582,6 +1540,84 @@
       </p:grpSpPr>
       <p:sp>
         <p:nvSpPr>
+          <p:cNvPr id="2" name="Shape 138"/>
+          <p:cNvSpPr>
+            <a:spLocks noGrp="1" noRot="1" noChangeAspect="1" noResize="1"/>
+          </p:cNvSpPr>
+          <p:nvPr>
+            <p:ph type="sldImg"/>
+          </p:nvPr>
+        </p:nvSpPr>
+        <p:spPr>
+          <a:xfrm>
+            <a:off x="1143000" y="685800"/>
+            <a:ext cx="4572000" cy="3429000"/>
+          </a:xfrm>
+          <a:solidFill>
+            <a:schemeClr val="accent1"/>
+          </a:solidFill>
+          <a:ln w="25400">
+            <a:solidFill>
+              <a:schemeClr val="accent1">
+                <a:shade val="50000"/>
+              </a:schemeClr>
+            </a:solidFill>
+            <a:prstDash val="solid"/>
+          </a:ln>
+        </p:spPr>
+      </p:sp>
+      <p:sp>
+        <p:nvSpPr>
+          <p:cNvPr id="3" name="Shape 139"/>
+          <p:cNvSpPr txBox="1">
+            <a:spLocks noGrp="1"/>
+          </p:cNvSpPr>
+          <p:nvPr>
+            <p:ph type="body" sz="quarter" idx="1"/>
+          </p:nvPr>
+        </p:nvSpPr>
+        <p:spPr>
+          <a:xfrm>
+            <a:off x="685799" y="4343400"/>
+            <a:ext cx="5486040" cy="4114440"/>
+          </a:xfrm>
+        </p:spPr>
+        <p:txBody>
+          <a:bodyPr wrap="square" lIns="91440" tIns="91440" rIns="91440" bIns="91440" anchor="t"/>
+          <a:lstStyle/>
+          <a:p>
+            <a:pPr lvl="0"/>
+            <a:endParaRPr lang="sk-SK"/>
+          </a:p>
+        </p:txBody>
+      </p:sp>
+    </p:spTree>
+  </p:cSld>
+  <p:clrMapOvr>
+    <a:masterClrMapping/>
+  </p:clrMapOvr>
+</p:notes>
+</file>
+
+<file path=ppt/notesSlides/notesSlide16.xml><?xml version="1.0" encoding="utf-8"?>
+<p:notes xmlns:a="http://schemas.openxmlformats.org/drawingml/2006/main" xmlns:r="http://schemas.openxmlformats.org/officeDocument/2006/relationships" xmlns:p="http://schemas.openxmlformats.org/presentationml/2006/main">
+  <p:cSld>
+    <p:spTree>
+      <p:nvGrpSpPr>
+        <p:cNvPr id="1" name=""/>
+        <p:cNvGrpSpPr/>
+        <p:nvPr/>
+      </p:nvGrpSpPr>
+      <p:grpSpPr>
+        <a:xfrm>
+          <a:off x="0" y="0"/>
+          <a:ext cx="0" cy="0"/>
+          <a:chOff x="0" y="0"/>
+          <a:chExt cx="0" cy="0"/>
+        </a:xfrm>
+      </p:grpSpPr>
+      <p:sp>
+        <p:nvSpPr>
           <p:cNvPr id="2" name="Shape 145"/>
           <p:cNvSpPr>
             <a:spLocks noGrp="1" noRot="1" noChangeAspect="1" noResize="1"/>
@@ -1611,84 +1647,6 @@
       <p:sp>
         <p:nvSpPr>
           <p:cNvPr id="3" name="Shape 146"/>
-          <p:cNvSpPr txBox="1">
-            <a:spLocks noGrp="1"/>
-          </p:cNvSpPr>
-          <p:nvPr>
-            <p:ph type="body" sz="quarter" idx="1"/>
-          </p:nvPr>
-        </p:nvSpPr>
-        <p:spPr>
-          <a:xfrm>
-            <a:off x="685799" y="4343400"/>
-            <a:ext cx="5486040" cy="4114440"/>
-          </a:xfrm>
-        </p:spPr>
-        <p:txBody>
-          <a:bodyPr wrap="square" lIns="91440" tIns="91440" rIns="91440" bIns="91440" anchor="t"/>
-          <a:lstStyle/>
-          <a:p>
-            <a:pPr lvl="0"/>
-            <a:endParaRPr lang="sk-SK"/>
-          </a:p>
-        </p:txBody>
-      </p:sp>
-    </p:spTree>
-  </p:cSld>
-  <p:clrMapOvr>
-    <a:masterClrMapping/>
-  </p:clrMapOvr>
-</p:notes>
-</file>
-
-<file path=ppt/notesSlides/notesSlide16.xml><?xml version="1.0" encoding="utf-8"?>
-<p:notes xmlns:a="http://schemas.openxmlformats.org/drawingml/2006/main" xmlns:r="http://schemas.openxmlformats.org/officeDocument/2006/relationships" xmlns:p="http://schemas.openxmlformats.org/presentationml/2006/main">
-  <p:cSld>
-    <p:spTree>
-      <p:nvGrpSpPr>
-        <p:cNvPr id="1" name=""/>
-        <p:cNvGrpSpPr/>
-        <p:nvPr/>
-      </p:nvGrpSpPr>
-      <p:grpSpPr>
-        <a:xfrm>
-          <a:off x="0" y="0"/>
-          <a:ext cx="0" cy="0"/>
-          <a:chOff x="0" y="0"/>
-          <a:chExt cx="0" cy="0"/>
-        </a:xfrm>
-      </p:grpSpPr>
-      <p:sp>
-        <p:nvSpPr>
-          <p:cNvPr id="2" name="Shape 138"/>
-          <p:cNvSpPr>
-            <a:spLocks noGrp="1" noRot="1" noChangeAspect="1" noResize="1"/>
-          </p:cNvSpPr>
-          <p:nvPr>
-            <p:ph type="sldImg"/>
-          </p:nvPr>
-        </p:nvSpPr>
-        <p:spPr>
-          <a:xfrm>
-            <a:off x="1143000" y="685800"/>
-            <a:ext cx="4572000" cy="3429000"/>
-          </a:xfrm>
-          <a:solidFill>
-            <a:schemeClr val="accent1"/>
-          </a:solidFill>
-          <a:ln w="25400">
-            <a:solidFill>
-              <a:schemeClr val="accent1">
-                <a:shade val="50000"/>
-              </a:schemeClr>
-            </a:solidFill>
-            <a:prstDash val="solid"/>
-          </a:ln>
-        </p:spPr>
-      </p:sp>
-      <p:sp>
-        <p:nvSpPr>
-          <p:cNvPr id="3" name="Shape 139"/>
           <p:cNvSpPr txBox="1">
             <a:spLocks noGrp="1"/>
           </p:cNvSpPr>
@@ -6964,7 +6922,7 @@
               <a:tabLst/>
             </a:pPr>
             <a:r>
-              <a:rPr lang="sk-SK" sz="3200" b="0" i="0" u="none" strike="noStrike" kern="1200" spc="0">
+              <a:rPr lang="sk-SK" sz="3200" b="0" i="0" u="none" strike="noStrike" kern="1200" spc="0" dirty="0">
                 <a:ln>
                   <a:noFill/>
                 </a:ln>
@@ -6978,7 +6936,7 @@
               <a:t>to </a:t>
             </a:r>
             <a:r>
-              <a:rPr lang="sk-SK" sz="3200" b="0" i="0" u="none" strike="noStrike" kern="1200" spc="0" err="1">
+              <a:rPr lang="sk-SK" sz="3200" b="0" i="0" u="none" strike="noStrike" kern="1200" spc="0" dirty="0" err="1">
                 <a:ln>
                   <a:noFill/>
                 </a:ln>
@@ -6992,7 +6950,7 @@
               <a:t>use</a:t>
             </a:r>
             <a:r>
-              <a:rPr lang="sk-SK" sz="3200" b="0" i="0" u="none" strike="noStrike" kern="1200" spc="0">
+              <a:rPr lang="sk-SK" sz="3200" b="0" i="0" u="none" strike="noStrike" kern="1200" spc="0" dirty="0">
                 <a:ln>
                   <a:noFill/>
                 </a:ln>
@@ -7006,7 +6964,7 @@
               <a:t> </a:t>
             </a:r>
             <a:r>
-              <a:rPr lang="sk-SK" sz="3200" b="0" i="0" u="none" strike="noStrike" kern="1200" spc="0" err="1">
+              <a:rPr lang="sk-SK" sz="3200" b="0" i="0" u="none" strike="noStrike" kern="1200" spc="0" dirty="0" err="1">
                 <a:ln>
                   <a:noFill/>
                 </a:ln>
@@ -7020,7 +6978,7 @@
               <a:t>floating</a:t>
             </a:r>
             <a:r>
-              <a:rPr lang="sk-SK" sz="3200" b="0" i="0" u="none" strike="noStrike" kern="1200" spc="0">
+              <a:rPr lang="sk-SK" sz="3200" b="0" i="0" u="none" strike="noStrike" kern="1200" spc="0" dirty="0">
                 <a:ln>
                   <a:noFill/>
                 </a:ln>
@@ -7034,7 +6992,7 @@
               <a:t> point </a:t>
             </a:r>
             <a:r>
-              <a:rPr lang="sk-SK" sz="3200" b="0" i="0" u="none" strike="noStrike" kern="1200" spc="0" err="1">
+              <a:rPr lang="sk-SK" sz="3200" b="0" i="0" u="none" strike="noStrike" kern="1200" spc="0" dirty="0" err="1">
                 <a:ln>
                   <a:noFill/>
                 </a:ln>
@@ -7048,7 +7006,7 @@
               <a:t>arithmetic</a:t>
             </a:r>
             <a:r>
-              <a:rPr lang="sk-SK" sz="3200" b="0" i="0" u="none" strike="noStrike" kern="1200" spc="0">
+              <a:rPr lang="sk-SK" sz="3200" b="0" i="0" u="none" strike="noStrike" kern="1200" spc="0" dirty="0">
                 <a:ln>
                   <a:noFill/>
                 </a:ln>
@@ -7062,7 +7020,7 @@
               <a:t>, </a:t>
             </a:r>
             <a:r>
-              <a:rPr lang="sk-SK" sz="3200" b="0" i="0" u="none" strike="noStrike" kern="1200" spc="0" err="1">
+              <a:rPr lang="sk-SK" sz="3200" b="0" i="0" u="none" strike="noStrike" kern="1200" spc="0" dirty="0" err="1">
                 <a:ln>
                   <a:noFill/>
                 </a:ln>
@@ -7076,7 +7034,7 @@
               <a:t>you</a:t>
             </a:r>
             <a:r>
-              <a:rPr lang="sk-SK" sz="3200" b="0" i="0" u="none" strike="noStrike" kern="1200" spc="0">
+              <a:rPr lang="sk-SK" sz="3200" b="0" i="0" u="none" strike="noStrike" kern="1200" spc="0" dirty="0">
                 <a:ln>
                   <a:noFill/>
                 </a:ln>
@@ -7090,7 +7048,7 @@
               <a:t> </a:t>
             </a:r>
             <a:r>
-              <a:rPr lang="sk-SK" sz="3200" b="0" i="0" u="none" strike="noStrike" kern="1200" spc="0" err="1">
+              <a:rPr lang="sk-SK" sz="3200" b="0" i="0" u="none" strike="noStrike" kern="1200" spc="0" dirty="0" err="1">
                 <a:ln>
                   <a:noFill/>
                 </a:ln>
@@ -7104,7 +7062,7 @@
               <a:t>can</a:t>
             </a:r>
             <a:r>
-              <a:rPr lang="sk-SK" sz="3200" b="0" i="0" u="none" strike="noStrike" kern="1200" spc="0">
+              <a:rPr lang="sk-SK" sz="3200" b="0" i="0" u="none" strike="noStrike" kern="1200" spc="0" dirty="0">
                 <a:ln>
                   <a:noFill/>
                 </a:ln>
@@ -7118,7 +7076,7 @@
               <a:t> </a:t>
             </a:r>
             <a:r>
-              <a:rPr lang="sk-SK" sz="3200" b="0" i="0" u="none" strike="noStrike" kern="1200" spc="0" err="1">
+              <a:rPr lang="sk-SK" sz="3200" b="0" i="0" u="none" strike="noStrike" kern="1200" spc="0" dirty="0" err="1">
                 <a:ln>
                   <a:noFill/>
                 </a:ln>
@@ -7132,7 +7090,7 @@
               <a:t>use</a:t>
             </a:r>
             <a:r>
-              <a:rPr lang="sk-SK" sz="3200" b="0" i="0" u="none" strike="noStrike" kern="1200" spc="0">
+              <a:rPr lang="sk-SK" sz="3200" b="0" i="0" u="none" strike="noStrike" kern="1200" spc="0" dirty="0">
                 <a:ln>
                   <a:noFill/>
                 </a:ln>
@@ -7146,7 +7104,7 @@
               <a:t> </a:t>
             </a:r>
             <a:r>
-              <a:rPr lang="sk-SK" sz="3200" b="0" i="0" u="none" strike="noStrike" kern="1200" spc="0" err="1">
+              <a:rPr lang="sk-SK" sz="3200" b="0" i="0" u="none" strike="noStrike" kern="1200" spc="0" dirty="0" err="1">
                 <a:ln>
                   <a:noFill/>
                 </a:ln>
@@ -7160,7 +7118,7 @@
               <a:t>calculator</a:t>
             </a:r>
             <a:r>
-              <a:rPr lang="sk-SK" sz="3200" b="0" i="0" u="none" strike="noStrike" kern="1200" spc="0">
+              <a:rPr lang="sk-SK" sz="3200" b="0" i="0" u="none" strike="noStrike" kern="1200" spc="0" dirty="0">
                 <a:ln>
                   <a:noFill/>
                 </a:ln>
@@ -7174,7 +7132,7 @@
               <a:t> utility </a:t>
             </a:r>
             <a:r>
-              <a:rPr lang="sk-SK" sz="3200" b="0" i="0" u="none" strike="noStrike" kern="1200" spc="0" err="1">
+              <a:rPr lang="sk-SK" sz="3200" b="0" i="0" u="none" strike="noStrike" kern="1200" spc="0" dirty="0" err="1">
                 <a:ln>
                   <a:noFill/>
                 </a:ln>
@@ -7187,7 +7145,7 @@
               </a:rPr>
               <a:t>bc</a:t>
             </a:r>
-            <a:endParaRPr lang="sk-SK" sz="3200" b="0" i="0" u="none" strike="noStrike" kern="1200" spc="0">
+            <a:endParaRPr lang="sk-SK" sz="3200" b="0" i="0" u="none" strike="noStrike" kern="1200" spc="0" dirty="0">
               <a:ln>
                 <a:noFill/>
               </a:ln>
@@ -7214,7 +7172,7 @@
               <a:tabLst/>
             </a:pPr>
             <a:r>
-              <a:rPr lang="sk-SK" sz="2800" b="0" i="0" u="none" strike="noStrike" kern="1200" spc="0">
+              <a:rPr lang="sk-SK" sz="2800" b="0" i="0" u="none" strike="noStrike" kern="1200" spc="0" dirty="0">
                 <a:ln>
                   <a:noFill/>
                 </a:ln>
@@ -7228,7 +7186,7 @@
               <a:t>$ </a:t>
             </a:r>
             <a:r>
-              <a:rPr lang="sk-SK" sz="2800" b="1" i="0" u="none" strike="noStrike" kern="1200" spc="0">
+              <a:rPr lang="sk-SK" sz="2800" b="1" i="0" u="none" strike="noStrike" kern="1200" spc="0" dirty="0">
                 <a:ln>
                   <a:noFill/>
                 </a:ln>
@@ -7242,7 +7200,7 @@
               <a:t>echo "</a:t>
             </a:r>
             <a:r>
-              <a:rPr lang="sk-SK" sz="2800" b="1" i="0" u="none" strike="noStrike" kern="1200" spc="0" err="1">
+              <a:rPr lang="sk-SK" sz="2800" b="1" i="0" u="none" strike="noStrike" kern="1200" spc="0" dirty="0" err="1">
                 <a:ln>
                   <a:noFill/>
                 </a:ln>
@@ -7256,7 +7214,7 @@
               <a:t>scale</a:t>
             </a:r>
             <a:r>
-              <a:rPr lang="sk-SK" sz="2800" b="1" i="0" u="none" strike="noStrike" kern="1200" spc="0">
+              <a:rPr lang="sk-SK" sz="2800" b="1" i="0" u="none" strike="noStrike" kern="1200" spc="0" dirty="0">
                 <a:ln>
                   <a:noFill/>
                 </a:ln>
@@ -7285,7 +7243,7 @@
               <a:tabLst/>
             </a:pPr>
             <a:r>
-              <a:rPr lang="sk-SK" sz="2800" b="0" i="0" u="none" strike="noStrike" kern="1200" spc="0">
+              <a:rPr lang="sk-SK" sz="2800" b="0" i="0" u="none" strike="noStrike" kern="1200" spc="0" dirty="0">
                 <a:ln>
                   <a:noFill/>
                 </a:ln>
@@ -7314,7 +7272,7 @@
               <a:tabLst/>
             </a:pPr>
             <a:r>
-              <a:rPr lang="sk-SK" sz="2800" b="0" i="0" u="none" strike="noStrike" kern="1200" spc="0">
+              <a:rPr lang="sk-SK" sz="2800" b="0" i="0" u="none" strike="noStrike" kern="1200" spc="0" dirty="0">
                 <a:ln>
                   <a:noFill/>
                 </a:ln>
@@ -7328,7 +7286,7 @@
               <a:t>$ </a:t>
             </a:r>
             <a:r>
-              <a:rPr lang="sk-SK" sz="2800" b="1" i="0" u="none" strike="noStrike" kern="1200" spc="0">
+              <a:rPr lang="sk-SK" sz="2800" b="1" i="0" u="none" strike="noStrike" kern="1200" spc="0" dirty="0">
                 <a:ln>
                   <a:noFill/>
                 </a:ln>
@@ -7342,7 +7300,7 @@
               <a:t>echo "</a:t>
             </a:r>
             <a:r>
-              <a:rPr lang="sk-SK" sz="2800" b="1" i="0" u="none" strike="noStrike" kern="1200" spc="0" err="1">
+              <a:rPr lang="sk-SK" sz="2800" b="1" i="0" u="none" strike="noStrike" kern="1200" spc="0" dirty="0" err="1">
                 <a:ln>
                   <a:noFill/>
                 </a:ln>
@@ -7356,7 +7314,7 @@
               <a:t>scale</a:t>
             </a:r>
             <a:r>
-              <a:rPr lang="sk-SK" sz="2800" b="1" i="0" u="none" strike="noStrike" kern="1200" spc="0">
+              <a:rPr lang="sk-SK" sz="2800" b="1" i="0" u="none" strike="noStrike" kern="1200" spc="0" dirty="0">
                 <a:ln>
                   <a:noFill/>
                 </a:ln>
@@ -7385,7 +7343,7 @@
               <a:tabLst/>
             </a:pPr>
             <a:r>
-              <a:rPr lang="sk-SK" sz="2800" b="0" i="0" u="none" strike="noStrike" kern="1200" spc="0">
+              <a:rPr lang="sk-SK" sz="2800" b="0" i="0" u="none" strike="noStrike" kern="1200" spc="0" dirty="0">
                 <a:ln>
                   <a:noFill/>
                 </a:ln>
@@ -7404,7 +7362,7 @@
               <a:buNone/>
             </a:pPr>
             <a:r>
-              <a:rPr lang="sk-SK" sz="2800" b="1">
+              <a:rPr lang="sk-SK" sz="2800" b="1" dirty="0">
                 <a:solidFill>
                   <a:srgbClr val="666666"/>
                 </a:solidFill>
@@ -7414,7 +7372,7 @@
               <a:t>echo "</a:t>
             </a:r>
             <a:r>
-              <a:rPr lang="sk-SK" sz="2800" b="1" err="1">
+              <a:rPr lang="sk-SK" sz="2800" b="1" dirty="0" err="1">
                 <a:solidFill>
                   <a:srgbClr val="666666"/>
                 </a:solidFill>
@@ -7424,7 +7382,7 @@
               <a:t>scale</a:t>
             </a:r>
             <a:r>
-              <a:rPr lang="sk-SK" sz="2800" b="1">
+              <a:rPr lang="sk-SK" sz="2800" b="1" dirty="0">
                 <a:solidFill>
                   <a:srgbClr val="666666"/>
                 </a:solidFill>
@@ -7434,7 +7392,7 @@
               <a:t>=5;1 / 5" | </a:t>
             </a:r>
             <a:r>
-              <a:rPr lang="sk-SK" sz="2800" b="1" err="1">
+              <a:rPr lang="sk-SK" sz="2800" b="1" dirty="0" err="1">
                 <a:solidFill>
                   <a:srgbClr val="666666"/>
                 </a:solidFill>
@@ -7444,7 +7402,7 @@
               <a:t>bc</a:t>
             </a:r>
             <a:r>
-              <a:rPr lang="sk-SK" sz="2800" b="1">
+              <a:rPr lang="sk-SK" sz="2800" b="1" dirty="0">
                 <a:solidFill>
                   <a:srgbClr val="666666"/>
                 </a:solidFill>
@@ -7454,7 +7412,7 @@
               <a:t> | </a:t>
             </a:r>
             <a:r>
-              <a:rPr lang="sk-SK" sz="2800" b="1" err="1">
+              <a:rPr lang="sk-SK" sz="2800" b="1" dirty="0" err="1">
                 <a:solidFill>
                   <a:srgbClr val="666666"/>
                 </a:solidFill>
@@ -7464,7 +7422,7 @@
               <a:t>awk</a:t>
             </a:r>
             <a:r>
-              <a:rPr lang="sk-SK" sz="2800" b="1">
+              <a:rPr lang="sk-SK" sz="2800" b="1" dirty="0">
                 <a:solidFill>
                   <a:srgbClr val="666666"/>
                 </a:solidFill>
@@ -7474,7 +7432,7 @@
               <a:t> '{</a:t>
             </a:r>
             <a:r>
-              <a:rPr lang="sk-SK" sz="2800" b="1" err="1">
+              <a:rPr lang="sk-SK" sz="2800" b="1" dirty="0" err="1">
                 <a:solidFill>
                   <a:srgbClr val="666666"/>
                 </a:solidFill>
@@ -7484,14 +7442,14 @@
               <a:t>printf</a:t>
             </a:r>
             <a:r>
-              <a:rPr lang="sk-SK" sz="2800" b="1">
+              <a:rPr lang="sk-SK" sz="2800" b="1" dirty="0">
                 <a:solidFill>
                   <a:srgbClr val="666666"/>
                 </a:solidFill>
                 <a:latin typeface="Courier New" pitchFamily="18"/>
                 <a:cs typeface="Courier New" pitchFamily="2"/>
               </a:rPr>
-              <a:t> "%0.2f", $1}‘</a:t>
+              <a:t> "%0.2f\n", $1}‘</a:t>
             </a:r>
           </a:p>
           <a:p>
@@ -7499,7 +7457,7 @@
               <a:buNone/>
             </a:pPr>
             <a:r>
-              <a:rPr lang="sk-SK" sz="2800">
+              <a:rPr lang="sk-SK" sz="2800" dirty="0">
                 <a:solidFill>
                   <a:srgbClr val="666666"/>
                 </a:solidFill>
@@ -10734,6 +10692,748 @@
 
 <file path=ppt/slides/slide16.xml><?xml version="1.0" encoding="utf-8"?>
 <p:sld xmlns:a="http://schemas.openxmlformats.org/drawingml/2006/main" xmlns:r="http://schemas.openxmlformats.org/officeDocument/2006/relationships" xmlns:p="http://schemas.openxmlformats.org/presentationml/2006/main">
+  <p:cSld name="Conditional Statements">
+    <p:spTree>
+      <p:nvGrpSpPr>
+        <p:cNvPr id="1" name=""/>
+        <p:cNvGrpSpPr/>
+        <p:nvPr/>
+      </p:nvGrpSpPr>
+      <p:grpSpPr>
+        <a:xfrm>
+          <a:off x="0" y="0"/>
+          <a:ext cx="0" cy="0"/>
+          <a:chOff x="0" y="0"/>
+          <a:chExt cx="0" cy="0"/>
+        </a:xfrm>
+      </p:grpSpPr>
+      <p:sp>
+        <p:nvSpPr>
+          <p:cNvPr id="2" name="Shape 134"/>
+          <p:cNvSpPr txBox="1">
+            <a:spLocks noGrp="1"/>
+          </p:cNvSpPr>
+          <p:nvPr>
+            <p:ph type="title" idx="4294967295"/>
+          </p:nvPr>
+        </p:nvSpPr>
+        <p:spPr>
+          <a:xfrm>
+            <a:off x="1535039" y="307800"/>
+            <a:ext cx="7240320" cy="771120"/>
+          </a:xfrm>
+        </p:spPr>
+        <p:txBody>
+          <a:bodyPr wrap="square" lIns="91440" tIns="91440" rIns="91440" bIns="91440"/>
+          <a:lstStyle>
+            <a:defPPr lvl="0">
+              <a:buSzPct val="45000"/>
+              <a:buFont typeface="StarSymbol"/>
+              <a:buNone/>
+            </a:defPPr>
+            <a:lvl1pPr lvl="0">
+              <a:buSzPct val="45000"/>
+              <a:buFont typeface="StarSymbol"/>
+              <a:buChar char="●"/>
+            </a:lvl1pPr>
+            <a:lvl2pPr lvl="1">
+              <a:buSzPct val="45000"/>
+              <a:buFont typeface="StarSymbol"/>
+              <a:buChar char="●"/>
+            </a:lvl2pPr>
+            <a:lvl3pPr lvl="2">
+              <a:buSzPct val="45000"/>
+              <a:buFont typeface="StarSymbol"/>
+              <a:buChar char="●"/>
+            </a:lvl3pPr>
+            <a:lvl4pPr lvl="3">
+              <a:buSzPct val="45000"/>
+              <a:buFont typeface="StarSymbol"/>
+              <a:buChar char="●"/>
+            </a:lvl4pPr>
+            <a:lvl5pPr lvl="4">
+              <a:buSzPct val="45000"/>
+              <a:buFont typeface="StarSymbol"/>
+              <a:buChar char="●"/>
+            </a:lvl5pPr>
+            <a:lvl6pPr lvl="5">
+              <a:buSzPct val="45000"/>
+              <a:buFont typeface="StarSymbol"/>
+              <a:buChar char="●"/>
+            </a:lvl6pPr>
+            <a:lvl7pPr lvl="6">
+              <a:buSzPct val="45000"/>
+              <a:buFont typeface="StarSymbol"/>
+              <a:buChar char="●"/>
+            </a:lvl7pPr>
+            <a:lvl8pPr lvl="7">
+              <a:buSzPct val="45000"/>
+              <a:buFont typeface="StarSymbol"/>
+              <a:buChar char="●"/>
+            </a:lvl8pPr>
+            <a:lvl9pPr lvl="8">
+              <a:buSzPct val="45000"/>
+              <a:buFont typeface="StarSymbol"/>
+              <a:buChar char="●"/>
+            </a:lvl9pPr>
+          </a:lstStyle>
+          <a:p>
+            <a:pPr lvl="0">
+              <a:buNone/>
+            </a:pPr>
+            <a:r>
+              <a:rPr lang="sk-SK" sz="4000" b="1">
+                <a:solidFill>
+                  <a:srgbClr val="444444"/>
+                </a:solidFill>
+              </a:rPr>
+              <a:t>Conditional Statements</a:t>
+            </a:r>
+          </a:p>
+        </p:txBody>
+      </p:sp>
+      <p:sp>
+        <p:nvSpPr>
+          <p:cNvPr id="3" name="Shape 135"/>
+          <p:cNvSpPr/>
+          <p:nvPr/>
+        </p:nvSpPr>
+        <p:spPr>
+          <a:xfrm>
+            <a:off x="1737359" y="1280159"/>
+            <a:ext cx="7016399" cy="4947839"/>
+          </a:xfrm>
+          <a:custGeom>
+            <a:avLst/>
+            <a:gdLst>
+              <a:gd name="f0" fmla="val 0"/>
+              <a:gd name="f1" fmla="val 21600"/>
+            </a:gdLst>
+            <a:ahLst/>
+            <a:cxnLst>
+              <a:cxn ang="3cd4">
+                <a:pos x="hc" y="t"/>
+              </a:cxn>
+              <a:cxn ang="0">
+                <a:pos x="r" y="vc"/>
+              </a:cxn>
+              <a:cxn ang="cd4">
+                <a:pos x="hc" y="b"/>
+              </a:cxn>
+              <a:cxn ang="cd2">
+                <a:pos x="l" y="vc"/>
+              </a:cxn>
+            </a:cxnLst>
+            <a:rect l="l" t="t" r="r" b="b"/>
+            <a:pathLst>
+              <a:path w="21600" h="21600">
+                <a:moveTo>
+                  <a:pt x="f0" y="f0"/>
+                </a:moveTo>
+                <a:lnTo>
+                  <a:pt x="f1" y="f0"/>
+                </a:lnTo>
+                <a:lnTo>
+                  <a:pt x="f1" y="f1"/>
+                </a:lnTo>
+                <a:lnTo>
+                  <a:pt x="f0" y="f1"/>
+                </a:lnTo>
+                <a:lnTo>
+                  <a:pt x="f0" y="f0"/>
+                </a:lnTo>
+                <a:close/>
+              </a:path>
+            </a:pathLst>
+          </a:custGeom>
+          <a:noFill/>
+          <a:ln>
+            <a:noFill/>
+            <a:prstDash val="solid"/>
+          </a:ln>
+        </p:spPr>
+        <p:txBody>
+          <a:bodyPr vert="horz" wrap="square" lIns="91440" tIns="91440" rIns="91440" bIns="91440" anchor="t" anchorCtr="0" compatLnSpc="0"/>
+          <a:lstStyle>
+            <a:defPPr lvl="0">
+              <a:buSzPct val="45000"/>
+              <a:buFont typeface="StarSymbol"/>
+              <a:buNone/>
+            </a:defPPr>
+            <a:lvl1pPr lvl="0">
+              <a:buSzPct val="45000"/>
+              <a:buFont typeface="StarSymbol"/>
+              <a:buChar char="●"/>
+            </a:lvl1pPr>
+            <a:lvl2pPr lvl="1">
+              <a:buSzPct val="45000"/>
+              <a:buFont typeface="StarSymbol"/>
+              <a:buChar char="●"/>
+            </a:lvl2pPr>
+            <a:lvl3pPr lvl="2">
+              <a:buSzPct val="45000"/>
+              <a:buFont typeface="StarSymbol"/>
+              <a:buChar char="●"/>
+            </a:lvl3pPr>
+            <a:lvl4pPr lvl="3">
+              <a:buSzPct val="45000"/>
+              <a:buFont typeface="StarSymbol"/>
+              <a:buChar char="●"/>
+            </a:lvl4pPr>
+            <a:lvl5pPr lvl="4">
+              <a:buSzPct val="45000"/>
+              <a:buFont typeface="StarSymbol"/>
+              <a:buChar char="●"/>
+            </a:lvl5pPr>
+            <a:lvl6pPr lvl="5">
+              <a:buSzPct val="45000"/>
+              <a:buFont typeface="StarSymbol"/>
+              <a:buChar char="●"/>
+            </a:lvl6pPr>
+            <a:lvl7pPr lvl="6">
+              <a:buSzPct val="45000"/>
+              <a:buFont typeface="StarSymbol"/>
+              <a:buChar char="●"/>
+            </a:lvl7pPr>
+            <a:lvl8pPr lvl="7">
+              <a:buSzPct val="45000"/>
+              <a:buFont typeface="StarSymbol"/>
+              <a:buChar char="●"/>
+            </a:lvl8pPr>
+            <a:lvl9pPr lvl="8">
+              <a:buSzPct val="45000"/>
+              <a:buFont typeface="StarSymbol"/>
+              <a:buChar char="●"/>
+            </a:lvl9pPr>
+          </a:lstStyle>
+          <a:p>
+            <a:pPr marL="0" marR="0" lvl="0" indent="0" algn="l" rtl="0" hangingPunct="0">
+              <a:lnSpc>
+                <a:spcPct val="100000"/>
+              </a:lnSpc>
+              <a:spcBef>
+                <a:spcPts val="0"/>
+              </a:spcBef>
+              <a:spcAft>
+                <a:spcPts val="0"/>
+              </a:spcAft>
+              <a:buNone/>
+              <a:tabLst/>
+            </a:pPr>
+            <a:r>
+              <a:rPr lang="sk-SK" sz="3200" b="0" i="0" u="none" strike="noStrike" kern="1200" spc="0">
+                <a:ln>
+                  <a:noFill/>
+                </a:ln>
+                <a:solidFill>
+                  <a:srgbClr val="666666"/>
+                </a:solidFill>
+                <a:latin typeface="arial" pitchFamily="18"/>
+                <a:ea typeface="arial" pitchFamily="2"/>
+                <a:cs typeface="arial" pitchFamily="2"/>
+              </a:rPr>
+              <a:t>syntax:</a:t>
+            </a:r>
+          </a:p>
+          <a:p>
+            <a:pPr marL="0" marR="0" lvl="0" indent="0" algn="l" rtl="0" hangingPunct="0">
+              <a:lnSpc>
+                <a:spcPct val="100000"/>
+              </a:lnSpc>
+              <a:spcBef>
+                <a:spcPts val="0"/>
+              </a:spcBef>
+              <a:spcAft>
+                <a:spcPts val="0"/>
+              </a:spcAft>
+              <a:buNone/>
+              <a:tabLst/>
+            </a:pPr>
+            <a:r>
+              <a:rPr lang="sk-SK" sz="3200" b="0" i="0" u="none" strike="noStrike" kern="1200" spc="0">
+                <a:ln>
+                  <a:noFill/>
+                </a:ln>
+                <a:solidFill>
+                  <a:srgbClr val="666666"/>
+                </a:solidFill>
+                <a:latin typeface="Courier New" pitchFamily="18"/>
+                <a:ea typeface="Courier New" pitchFamily="2"/>
+                <a:cs typeface="Courier New" pitchFamily="2"/>
+              </a:rPr>
+              <a:t> </a:t>
+            </a:r>
+          </a:p>
+          <a:p>
+            <a:pPr marL="0" marR="0" lvl="0" indent="0" algn="l" rtl="0" hangingPunct="0">
+              <a:lnSpc>
+                <a:spcPct val="100000"/>
+              </a:lnSpc>
+              <a:spcBef>
+                <a:spcPts val="0"/>
+              </a:spcBef>
+              <a:spcAft>
+                <a:spcPts val="0"/>
+              </a:spcAft>
+              <a:buNone/>
+              <a:tabLst/>
+            </a:pPr>
+            <a:r>
+              <a:rPr lang="sk-SK" sz="3200" b="1" i="0" u="none" strike="noStrike" kern="1200" spc="0">
+                <a:ln>
+                  <a:noFill/>
+                </a:ln>
+                <a:solidFill>
+                  <a:srgbClr val="666666"/>
+                </a:solidFill>
+                <a:latin typeface="Courier New" pitchFamily="18"/>
+                <a:ea typeface="Courier New" pitchFamily="2"/>
+                <a:cs typeface="Courier New" pitchFamily="2"/>
+              </a:rPr>
+              <a:t>if</a:t>
+            </a:r>
+            <a:r>
+              <a:rPr lang="sk-SK" sz="3200" b="0" i="0" u="none" strike="noStrike" kern="1200" spc="0">
+                <a:ln>
+                  <a:noFill/>
+                </a:ln>
+                <a:solidFill>
+                  <a:srgbClr val="666666"/>
+                </a:solidFill>
+                <a:latin typeface="Courier New" pitchFamily="18"/>
+                <a:ea typeface="Courier New" pitchFamily="2"/>
+                <a:cs typeface="Courier New" pitchFamily="2"/>
+              </a:rPr>
+              <a:t> CONDITION; </a:t>
+            </a:r>
+            <a:r>
+              <a:rPr lang="sk-SK" sz="3200" b="1" i="0" u="none" strike="noStrike" kern="1200" spc="0">
+                <a:ln>
+                  <a:noFill/>
+                </a:ln>
+                <a:solidFill>
+                  <a:srgbClr val="666666"/>
+                </a:solidFill>
+                <a:latin typeface="Courier New" pitchFamily="18"/>
+                <a:ea typeface="Courier New" pitchFamily="2"/>
+                <a:cs typeface="Courier New" pitchFamily="2"/>
+              </a:rPr>
+              <a:t>then</a:t>
+            </a:r>
+          </a:p>
+          <a:p>
+            <a:pPr marL="0" marR="0" lvl="0" indent="0" algn="l" rtl="0" hangingPunct="0">
+              <a:lnSpc>
+                <a:spcPct val="100000"/>
+              </a:lnSpc>
+              <a:spcBef>
+                <a:spcPts val="0"/>
+              </a:spcBef>
+              <a:spcAft>
+                <a:spcPts val="0"/>
+              </a:spcAft>
+              <a:buNone/>
+              <a:tabLst/>
+            </a:pPr>
+            <a:r>
+              <a:rPr lang="sk-SK" sz="3200" b="0" i="0" u="none" strike="noStrike" kern="1200" spc="0">
+                <a:ln>
+                  <a:noFill/>
+                </a:ln>
+                <a:solidFill>
+                  <a:srgbClr val="666666"/>
+                </a:solidFill>
+                <a:latin typeface="Courier New" pitchFamily="18"/>
+                <a:ea typeface="Courier New" pitchFamily="2"/>
+                <a:cs typeface="Courier New" pitchFamily="2"/>
+              </a:rPr>
+              <a:t>   COMMANDS</a:t>
+            </a:r>
+          </a:p>
+          <a:p>
+            <a:pPr marL="0" marR="0" lvl="0" indent="0" algn="l" rtl="0" hangingPunct="0">
+              <a:lnSpc>
+                <a:spcPct val="100000"/>
+              </a:lnSpc>
+              <a:spcBef>
+                <a:spcPts val="0"/>
+              </a:spcBef>
+              <a:spcAft>
+                <a:spcPts val="0"/>
+              </a:spcAft>
+              <a:buNone/>
+              <a:tabLst/>
+            </a:pPr>
+            <a:r>
+              <a:rPr lang="sk-SK" sz="3200" b="1" i="0" u="none" strike="noStrike" kern="1200" spc="0">
+                <a:ln>
+                  <a:noFill/>
+                </a:ln>
+                <a:solidFill>
+                  <a:srgbClr val="666666"/>
+                </a:solidFill>
+                <a:latin typeface="Courier New" pitchFamily="18"/>
+                <a:ea typeface="Courier New" pitchFamily="2"/>
+                <a:cs typeface="Courier New" pitchFamily="2"/>
+              </a:rPr>
+              <a:t>[elif</a:t>
+            </a:r>
+            <a:r>
+              <a:rPr lang="sk-SK" sz="3200" b="0" i="0" u="none" strike="noStrike" kern="1200" spc="0">
+                <a:ln>
+                  <a:noFill/>
+                </a:ln>
+                <a:solidFill>
+                  <a:srgbClr val="666666"/>
+                </a:solidFill>
+                <a:latin typeface="Courier New" pitchFamily="18"/>
+                <a:ea typeface="Courier New" pitchFamily="2"/>
+                <a:cs typeface="Courier New" pitchFamily="2"/>
+              </a:rPr>
+              <a:t> CONDITION; </a:t>
+            </a:r>
+            <a:r>
+              <a:rPr lang="sk-SK" sz="3200" b="1" i="0" u="none" strike="noStrike" kern="1200" spc="0">
+                <a:ln>
+                  <a:noFill/>
+                </a:ln>
+                <a:solidFill>
+                  <a:srgbClr val="666666"/>
+                </a:solidFill>
+                <a:latin typeface="Courier New" pitchFamily="18"/>
+                <a:ea typeface="Courier New" pitchFamily="2"/>
+                <a:cs typeface="Courier New" pitchFamily="2"/>
+              </a:rPr>
+              <a:t>then</a:t>
+            </a:r>
+          </a:p>
+          <a:p>
+            <a:pPr marL="0" marR="0" lvl="0" indent="0" algn="l" rtl="0" hangingPunct="0">
+              <a:lnSpc>
+                <a:spcPct val="100000"/>
+              </a:lnSpc>
+              <a:spcBef>
+                <a:spcPts val="0"/>
+              </a:spcBef>
+              <a:spcAft>
+                <a:spcPts val="0"/>
+              </a:spcAft>
+              <a:buNone/>
+              <a:tabLst/>
+            </a:pPr>
+            <a:r>
+              <a:rPr lang="sk-SK" sz="3200" b="0" i="0" u="none" strike="noStrike" kern="1200" spc="0">
+                <a:ln>
+                  <a:noFill/>
+                </a:ln>
+                <a:solidFill>
+                  <a:srgbClr val="666666"/>
+                </a:solidFill>
+                <a:latin typeface="Courier New" pitchFamily="18"/>
+                <a:ea typeface="Courier New" pitchFamily="2"/>
+                <a:cs typeface="Courier New" pitchFamily="2"/>
+              </a:rPr>
+              <a:t>   COMMANDS </a:t>
+            </a:r>
+            <a:r>
+              <a:rPr lang="sk-SK" sz="3200" b="1" i="0" u="none" strike="noStrike" kern="1200" spc="0">
+                <a:ln>
+                  <a:noFill/>
+                </a:ln>
+                <a:solidFill>
+                  <a:srgbClr val="666666"/>
+                </a:solidFill>
+                <a:latin typeface="Courier New" pitchFamily="18"/>
+                <a:ea typeface="Courier New" pitchFamily="2"/>
+                <a:cs typeface="Courier New" pitchFamily="2"/>
+              </a:rPr>
+              <a:t>]</a:t>
+            </a:r>
+          </a:p>
+          <a:p>
+            <a:pPr marL="0" marR="0" lvl="0" indent="0" algn="l" rtl="0" hangingPunct="0">
+              <a:lnSpc>
+                <a:spcPct val="100000"/>
+              </a:lnSpc>
+              <a:spcBef>
+                <a:spcPts val="0"/>
+              </a:spcBef>
+              <a:spcAft>
+                <a:spcPts val="0"/>
+              </a:spcAft>
+              <a:buNone/>
+              <a:tabLst/>
+            </a:pPr>
+            <a:r>
+              <a:rPr lang="sk-SK" sz="3200" b="1" i="0" u="none" strike="noStrike" kern="1200" spc="0">
+                <a:ln>
+                  <a:noFill/>
+                </a:ln>
+                <a:solidFill>
+                  <a:srgbClr val="666666"/>
+                </a:solidFill>
+                <a:latin typeface="Courier New" pitchFamily="18"/>
+                <a:ea typeface="Courier New" pitchFamily="2"/>
+                <a:cs typeface="Courier New" pitchFamily="2"/>
+              </a:rPr>
+              <a:t>[else</a:t>
+            </a:r>
+          </a:p>
+          <a:p>
+            <a:pPr marL="0" marR="0" lvl="0" indent="0" algn="l" rtl="0" hangingPunct="0">
+              <a:lnSpc>
+                <a:spcPct val="100000"/>
+              </a:lnSpc>
+              <a:spcBef>
+                <a:spcPts val="0"/>
+              </a:spcBef>
+              <a:spcAft>
+                <a:spcPts val="0"/>
+              </a:spcAft>
+              <a:buNone/>
+              <a:tabLst/>
+            </a:pPr>
+            <a:r>
+              <a:rPr lang="sk-SK" sz="3200" b="0" i="0" u="none" strike="noStrike" kern="1200" spc="0">
+                <a:ln>
+                  <a:noFill/>
+                </a:ln>
+                <a:solidFill>
+                  <a:srgbClr val="666666"/>
+                </a:solidFill>
+                <a:latin typeface="Courier New" pitchFamily="18"/>
+                <a:ea typeface="Courier New" pitchFamily="2"/>
+                <a:cs typeface="Courier New" pitchFamily="2"/>
+              </a:rPr>
+              <a:t>   COMMANDS </a:t>
+            </a:r>
+            <a:r>
+              <a:rPr lang="sk-SK" sz="3200" b="1" i="0" u="none" strike="noStrike" kern="1200" spc="0">
+                <a:ln>
+                  <a:noFill/>
+                </a:ln>
+                <a:solidFill>
+                  <a:srgbClr val="666666"/>
+                </a:solidFill>
+                <a:latin typeface="Courier New" pitchFamily="18"/>
+                <a:ea typeface="Courier New" pitchFamily="2"/>
+                <a:cs typeface="Courier New" pitchFamily="2"/>
+              </a:rPr>
+              <a:t>]</a:t>
+            </a:r>
+          </a:p>
+          <a:p>
+            <a:pPr marL="0" marR="0" lvl="0" indent="0" algn="l" rtl="0" hangingPunct="0">
+              <a:lnSpc>
+                <a:spcPct val="100000"/>
+              </a:lnSpc>
+              <a:spcBef>
+                <a:spcPts val="0"/>
+              </a:spcBef>
+              <a:spcAft>
+                <a:spcPts val="0"/>
+              </a:spcAft>
+              <a:buNone/>
+              <a:tabLst/>
+            </a:pPr>
+            <a:r>
+              <a:rPr lang="sk-SK" sz="3200" b="1" i="0" u="none" strike="noStrike" kern="1200" spc="0">
+                <a:ln>
+                  <a:noFill/>
+                </a:ln>
+                <a:solidFill>
+                  <a:srgbClr val="666666"/>
+                </a:solidFill>
+                <a:latin typeface="Courier New" pitchFamily="18"/>
+                <a:ea typeface="Courier New" pitchFamily="2"/>
+                <a:cs typeface="Courier New" pitchFamily="2"/>
+              </a:rPr>
+              <a:t>fi</a:t>
+            </a:r>
+          </a:p>
+          <a:p>
+            <a:pPr marL="0" marR="0" lvl="0" indent="0" algn="l" rtl="0" hangingPunct="0">
+              <a:lnSpc>
+                <a:spcPct val="100000"/>
+              </a:lnSpc>
+              <a:spcBef>
+                <a:spcPts val="0"/>
+              </a:spcBef>
+              <a:spcAft>
+                <a:spcPts val="0"/>
+              </a:spcAft>
+              <a:buNone/>
+              <a:tabLst/>
+            </a:pPr>
+            <a:endParaRPr lang="sk-SK" sz="3200" b="1" i="0" u="none" strike="noStrike" kern="1200" spc="0">
+              <a:ln>
+                <a:noFill/>
+              </a:ln>
+              <a:solidFill>
+                <a:srgbClr val="666666"/>
+              </a:solidFill>
+              <a:latin typeface="Courier New" pitchFamily="18"/>
+              <a:ea typeface="Courier New" pitchFamily="2"/>
+              <a:cs typeface="Courier New" pitchFamily="2"/>
+            </a:endParaRPr>
+          </a:p>
+        </p:txBody>
+      </p:sp>
+      <p:sp>
+        <p:nvSpPr>
+          <p:cNvPr id="4" name="Shape 136"/>
+          <p:cNvSpPr/>
+          <p:nvPr/>
+        </p:nvSpPr>
+        <p:spPr>
+          <a:xfrm>
+            <a:off x="0" y="5486399"/>
+            <a:ext cx="1142640" cy="1371240"/>
+          </a:xfrm>
+          <a:custGeom>
+            <a:avLst/>
+            <a:gdLst>
+              <a:gd name="f0" fmla="val 0"/>
+              <a:gd name="f1" fmla="val 21600"/>
+            </a:gdLst>
+            <a:ahLst/>
+            <a:cxnLst>
+              <a:cxn ang="3cd4">
+                <a:pos x="hc" y="t"/>
+              </a:cxn>
+              <a:cxn ang="0">
+                <a:pos x="r" y="vc"/>
+              </a:cxn>
+              <a:cxn ang="cd4">
+                <a:pos x="hc" y="b"/>
+              </a:cxn>
+              <a:cxn ang="cd2">
+                <a:pos x="l" y="vc"/>
+              </a:cxn>
+            </a:cxnLst>
+            <a:rect l="l" t="t" r="r" b="b"/>
+            <a:pathLst>
+              <a:path w="21600" h="21600">
+                <a:moveTo>
+                  <a:pt x="f0" y="f0"/>
+                </a:moveTo>
+                <a:lnTo>
+                  <a:pt x="f1" y="f0"/>
+                </a:lnTo>
+                <a:lnTo>
+                  <a:pt x="f1" y="f1"/>
+                </a:lnTo>
+                <a:lnTo>
+                  <a:pt x="f0" y="f1"/>
+                </a:lnTo>
+                <a:lnTo>
+                  <a:pt x="f0" y="f0"/>
+                </a:lnTo>
+                <a:close/>
+              </a:path>
+            </a:pathLst>
+          </a:custGeom>
+          <a:blipFill>
+            <a:blip r:embed="rId3" r:link="rId4" cstate="print"/>
+            <a:stretch>
+              <a:fillRect/>
+            </a:stretch>
+          </a:blipFill>
+          <a:ln>
+            <a:noFill/>
+            <a:prstDash val="solid"/>
+          </a:ln>
+        </p:spPr>
+        <p:txBody>
+          <a:bodyPr vert="horz" wrap="square" lIns="90000" tIns="45000" rIns="90000" bIns="45000" anchor="t" anchorCtr="0" compatLnSpc="0"/>
+          <a:lstStyle>
+            <a:defPPr lvl="0">
+              <a:buSzPct val="45000"/>
+              <a:buFont typeface="StarSymbol"/>
+              <a:buNone/>
+            </a:defPPr>
+            <a:lvl1pPr lvl="0">
+              <a:buSzPct val="45000"/>
+              <a:buFont typeface="StarSymbol"/>
+              <a:buChar char="●"/>
+            </a:lvl1pPr>
+            <a:lvl2pPr lvl="1">
+              <a:buSzPct val="45000"/>
+              <a:buFont typeface="StarSymbol"/>
+              <a:buChar char="●"/>
+            </a:lvl2pPr>
+            <a:lvl3pPr lvl="2">
+              <a:buSzPct val="45000"/>
+              <a:buFont typeface="StarSymbol"/>
+              <a:buChar char="●"/>
+            </a:lvl3pPr>
+            <a:lvl4pPr lvl="3">
+              <a:buSzPct val="45000"/>
+              <a:buFont typeface="StarSymbol"/>
+              <a:buChar char="●"/>
+            </a:lvl4pPr>
+            <a:lvl5pPr lvl="4">
+              <a:buSzPct val="45000"/>
+              <a:buFont typeface="StarSymbol"/>
+              <a:buChar char="●"/>
+            </a:lvl5pPr>
+            <a:lvl6pPr lvl="5">
+              <a:buSzPct val="45000"/>
+              <a:buFont typeface="StarSymbol"/>
+              <a:buChar char="●"/>
+            </a:lvl6pPr>
+            <a:lvl7pPr lvl="6">
+              <a:buSzPct val="45000"/>
+              <a:buFont typeface="StarSymbol"/>
+              <a:buChar char="●"/>
+            </a:lvl7pPr>
+            <a:lvl8pPr lvl="7">
+              <a:buSzPct val="45000"/>
+              <a:buFont typeface="StarSymbol"/>
+              <a:buChar char="●"/>
+            </a:lvl8pPr>
+            <a:lvl9pPr lvl="8">
+              <a:buSzPct val="45000"/>
+              <a:buFont typeface="StarSymbol"/>
+              <a:buChar char="●"/>
+            </a:lvl9pPr>
+          </a:lstStyle>
+          <a:p>
+            <a:pPr marL="0" marR="0" lvl="0" indent="0" rtl="0" hangingPunct="0">
+              <a:lnSpc>
+                <a:spcPct val="100000"/>
+              </a:lnSpc>
+              <a:spcBef>
+                <a:spcPts val="0"/>
+              </a:spcBef>
+              <a:spcAft>
+                <a:spcPts val="0"/>
+              </a:spcAft>
+              <a:buNone/>
+              <a:tabLst/>
+            </a:pPr>
+            <a:endParaRPr lang="sk-SK" sz="1800" b="0" i="0" u="none" strike="noStrike" kern="1200">
+              <a:ln>
+                <a:noFill/>
+              </a:ln>
+              <a:latin typeface="Liberation Sans" pitchFamily="18"/>
+              <a:ea typeface="DejaVu Sans" pitchFamily="2"/>
+              <a:cs typeface="DejaVu Sans" pitchFamily="2"/>
+            </a:endParaRPr>
+          </a:p>
+        </p:txBody>
+      </p:sp>
+    </p:spTree>
+  </p:cSld>
+  <p:clrMapOvr>
+    <a:masterClrMapping/>
+  </p:clrMapOvr>
+  <p:transition/>
+</p:sld>
+</file>
+
+<file path=ppt/slides/slide17.xml><?xml version="1.0" encoding="utf-8"?>
+<p:sld xmlns:a="http://schemas.openxmlformats.org/drawingml/2006/main" xmlns:r="http://schemas.openxmlformats.org/officeDocument/2006/relationships" xmlns:p="http://schemas.openxmlformats.org/presentationml/2006/main">
   <p:cSld name="Conditional Statements Example">
     <p:spTree>
       <p:nvGrpSpPr>
@@ -11728,748 +12428,6 @@
 </p:sld>
 </file>
 
-<file path=ppt/slides/slide17.xml><?xml version="1.0" encoding="utf-8"?>
-<p:sld xmlns:a="http://schemas.openxmlformats.org/drawingml/2006/main" xmlns:r="http://schemas.openxmlformats.org/officeDocument/2006/relationships" xmlns:p="http://schemas.openxmlformats.org/presentationml/2006/main">
-  <p:cSld name="Conditional Statements">
-    <p:spTree>
-      <p:nvGrpSpPr>
-        <p:cNvPr id="1" name=""/>
-        <p:cNvGrpSpPr/>
-        <p:nvPr/>
-      </p:nvGrpSpPr>
-      <p:grpSpPr>
-        <a:xfrm>
-          <a:off x="0" y="0"/>
-          <a:ext cx="0" cy="0"/>
-          <a:chOff x="0" y="0"/>
-          <a:chExt cx="0" cy="0"/>
-        </a:xfrm>
-      </p:grpSpPr>
-      <p:sp>
-        <p:nvSpPr>
-          <p:cNvPr id="2" name="Shape 134"/>
-          <p:cNvSpPr txBox="1">
-            <a:spLocks noGrp="1"/>
-          </p:cNvSpPr>
-          <p:nvPr>
-            <p:ph type="title" idx="4294967295"/>
-          </p:nvPr>
-        </p:nvSpPr>
-        <p:spPr>
-          <a:xfrm>
-            <a:off x="1535039" y="307800"/>
-            <a:ext cx="7240320" cy="771120"/>
-          </a:xfrm>
-        </p:spPr>
-        <p:txBody>
-          <a:bodyPr wrap="square" lIns="91440" tIns="91440" rIns="91440" bIns="91440"/>
-          <a:lstStyle>
-            <a:defPPr lvl="0">
-              <a:buSzPct val="45000"/>
-              <a:buFont typeface="StarSymbol"/>
-              <a:buNone/>
-            </a:defPPr>
-            <a:lvl1pPr lvl="0">
-              <a:buSzPct val="45000"/>
-              <a:buFont typeface="StarSymbol"/>
-              <a:buChar char="●"/>
-            </a:lvl1pPr>
-            <a:lvl2pPr lvl="1">
-              <a:buSzPct val="45000"/>
-              <a:buFont typeface="StarSymbol"/>
-              <a:buChar char="●"/>
-            </a:lvl2pPr>
-            <a:lvl3pPr lvl="2">
-              <a:buSzPct val="45000"/>
-              <a:buFont typeface="StarSymbol"/>
-              <a:buChar char="●"/>
-            </a:lvl3pPr>
-            <a:lvl4pPr lvl="3">
-              <a:buSzPct val="45000"/>
-              <a:buFont typeface="StarSymbol"/>
-              <a:buChar char="●"/>
-            </a:lvl4pPr>
-            <a:lvl5pPr lvl="4">
-              <a:buSzPct val="45000"/>
-              <a:buFont typeface="StarSymbol"/>
-              <a:buChar char="●"/>
-            </a:lvl5pPr>
-            <a:lvl6pPr lvl="5">
-              <a:buSzPct val="45000"/>
-              <a:buFont typeface="StarSymbol"/>
-              <a:buChar char="●"/>
-            </a:lvl6pPr>
-            <a:lvl7pPr lvl="6">
-              <a:buSzPct val="45000"/>
-              <a:buFont typeface="StarSymbol"/>
-              <a:buChar char="●"/>
-            </a:lvl7pPr>
-            <a:lvl8pPr lvl="7">
-              <a:buSzPct val="45000"/>
-              <a:buFont typeface="StarSymbol"/>
-              <a:buChar char="●"/>
-            </a:lvl8pPr>
-            <a:lvl9pPr lvl="8">
-              <a:buSzPct val="45000"/>
-              <a:buFont typeface="StarSymbol"/>
-              <a:buChar char="●"/>
-            </a:lvl9pPr>
-          </a:lstStyle>
-          <a:p>
-            <a:pPr lvl="0">
-              <a:buNone/>
-            </a:pPr>
-            <a:r>
-              <a:rPr lang="sk-SK" sz="4000" b="1">
-                <a:solidFill>
-                  <a:srgbClr val="444444"/>
-                </a:solidFill>
-              </a:rPr>
-              <a:t>Conditional Statements</a:t>
-            </a:r>
-          </a:p>
-        </p:txBody>
-      </p:sp>
-      <p:sp>
-        <p:nvSpPr>
-          <p:cNvPr id="3" name="Shape 135"/>
-          <p:cNvSpPr/>
-          <p:nvPr/>
-        </p:nvSpPr>
-        <p:spPr>
-          <a:xfrm>
-            <a:off x="1737359" y="1280159"/>
-            <a:ext cx="7016399" cy="4947839"/>
-          </a:xfrm>
-          <a:custGeom>
-            <a:avLst/>
-            <a:gdLst>
-              <a:gd name="f0" fmla="val 0"/>
-              <a:gd name="f1" fmla="val 21600"/>
-            </a:gdLst>
-            <a:ahLst/>
-            <a:cxnLst>
-              <a:cxn ang="3cd4">
-                <a:pos x="hc" y="t"/>
-              </a:cxn>
-              <a:cxn ang="0">
-                <a:pos x="r" y="vc"/>
-              </a:cxn>
-              <a:cxn ang="cd4">
-                <a:pos x="hc" y="b"/>
-              </a:cxn>
-              <a:cxn ang="cd2">
-                <a:pos x="l" y="vc"/>
-              </a:cxn>
-            </a:cxnLst>
-            <a:rect l="l" t="t" r="r" b="b"/>
-            <a:pathLst>
-              <a:path w="21600" h="21600">
-                <a:moveTo>
-                  <a:pt x="f0" y="f0"/>
-                </a:moveTo>
-                <a:lnTo>
-                  <a:pt x="f1" y="f0"/>
-                </a:lnTo>
-                <a:lnTo>
-                  <a:pt x="f1" y="f1"/>
-                </a:lnTo>
-                <a:lnTo>
-                  <a:pt x="f0" y="f1"/>
-                </a:lnTo>
-                <a:lnTo>
-                  <a:pt x="f0" y="f0"/>
-                </a:lnTo>
-                <a:close/>
-              </a:path>
-            </a:pathLst>
-          </a:custGeom>
-          <a:noFill/>
-          <a:ln>
-            <a:noFill/>
-            <a:prstDash val="solid"/>
-          </a:ln>
-        </p:spPr>
-        <p:txBody>
-          <a:bodyPr vert="horz" wrap="square" lIns="91440" tIns="91440" rIns="91440" bIns="91440" anchor="t" anchorCtr="0" compatLnSpc="0"/>
-          <a:lstStyle>
-            <a:defPPr lvl="0">
-              <a:buSzPct val="45000"/>
-              <a:buFont typeface="StarSymbol"/>
-              <a:buNone/>
-            </a:defPPr>
-            <a:lvl1pPr lvl="0">
-              <a:buSzPct val="45000"/>
-              <a:buFont typeface="StarSymbol"/>
-              <a:buChar char="●"/>
-            </a:lvl1pPr>
-            <a:lvl2pPr lvl="1">
-              <a:buSzPct val="45000"/>
-              <a:buFont typeface="StarSymbol"/>
-              <a:buChar char="●"/>
-            </a:lvl2pPr>
-            <a:lvl3pPr lvl="2">
-              <a:buSzPct val="45000"/>
-              <a:buFont typeface="StarSymbol"/>
-              <a:buChar char="●"/>
-            </a:lvl3pPr>
-            <a:lvl4pPr lvl="3">
-              <a:buSzPct val="45000"/>
-              <a:buFont typeface="StarSymbol"/>
-              <a:buChar char="●"/>
-            </a:lvl4pPr>
-            <a:lvl5pPr lvl="4">
-              <a:buSzPct val="45000"/>
-              <a:buFont typeface="StarSymbol"/>
-              <a:buChar char="●"/>
-            </a:lvl5pPr>
-            <a:lvl6pPr lvl="5">
-              <a:buSzPct val="45000"/>
-              <a:buFont typeface="StarSymbol"/>
-              <a:buChar char="●"/>
-            </a:lvl6pPr>
-            <a:lvl7pPr lvl="6">
-              <a:buSzPct val="45000"/>
-              <a:buFont typeface="StarSymbol"/>
-              <a:buChar char="●"/>
-            </a:lvl7pPr>
-            <a:lvl8pPr lvl="7">
-              <a:buSzPct val="45000"/>
-              <a:buFont typeface="StarSymbol"/>
-              <a:buChar char="●"/>
-            </a:lvl8pPr>
-            <a:lvl9pPr lvl="8">
-              <a:buSzPct val="45000"/>
-              <a:buFont typeface="StarSymbol"/>
-              <a:buChar char="●"/>
-            </a:lvl9pPr>
-          </a:lstStyle>
-          <a:p>
-            <a:pPr marL="0" marR="0" lvl="0" indent="0" algn="l" rtl="0" hangingPunct="0">
-              <a:lnSpc>
-                <a:spcPct val="100000"/>
-              </a:lnSpc>
-              <a:spcBef>
-                <a:spcPts val="0"/>
-              </a:spcBef>
-              <a:spcAft>
-                <a:spcPts val="0"/>
-              </a:spcAft>
-              <a:buNone/>
-              <a:tabLst/>
-            </a:pPr>
-            <a:r>
-              <a:rPr lang="sk-SK" sz="3200" b="0" i="0" u="none" strike="noStrike" kern="1200" spc="0">
-                <a:ln>
-                  <a:noFill/>
-                </a:ln>
-                <a:solidFill>
-                  <a:srgbClr val="666666"/>
-                </a:solidFill>
-                <a:latin typeface="arial" pitchFamily="18"/>
-                <a:ea typeface="arial" pitchFamily="2"/>
-                <a:cs typeface="arial" pitchFamily="2"/>
-              </a:rPr>
-              <a:t>syntax:</a:t>
-            </a:r>
-          </a:p>
-          <a:p>
-            <a:pPr marL="0" marR="0" lvl="0" indent="0" algn="l" rtl="0" hangingPunct="0">
-              <a:lnSpc>
-                <a:spcPct val="100000"/>
-              </a:lnSpc>
-              <a:spcBef>
-                <a:spcPts val="0"/>
-              </a:spcBef>
-              <a:spcAft>
-                <a:spcPts val="0"/>
-              </a:spcAft>
-              <a:buNone/>
-              <a:tabLst/>
-            </a:pPr>
-            <a:r>
-              <a:rPr lang="sk-SK" sz="3200" b="0" i="0" u="none" strike="noStrike" kern="1200" spc="0">
-                <a:ln>
-                  <a:noFill/>
-                </a:ln>
-                <a:solidFill>
-                  <a:srgbClr val="666666"/>
-                </a:solidFill>
-                <a:latin typeface="Courier New" pitchFamily="18"/>
-                <a:ea typeface="Courier New" pitchFamily="2"/>
-                <a:cs typeface="Courier New" pitchFamily="2"/>
-              </a:rPr>
-              <a:t> </a:t>
-            </a:r>
-          </a:p>
-          <a:p>
-            <a:pPr marL="0" marR="0" lvl="0" indent="0" algn="l" rtl="0" hangingPunct="0">
-              <a:lnSpc>
-                <a:spcPct val="100000"/>
-              </a:lnSpc>
-              <a:spcBef>
-                <a:spcPts val="0"/>
-              </a:spcBef>
-              <a:spcAft>
-                <a:spcPts val="0"/>
-              </a:spcAft>
-              <a:buNone/>
-              <a:tabLst/>
-            </a:pPr>
-            <a:r>
-              <a:rPr lang="sk-SK" sz="3200" b="1" i="0" u="none" strike="noStrike" kern="1200" spc="0">
-                <a:ln>
-                  <a:noFill/>
-                </a:ln>
-                <a:solidFill>
-                  <a:srgbClr val="666666"/>
-                </a:solidFill>
-                <a:latin typeface="Courier New" pitchFamily="18"/>
-                <a:ea typeface="Courier New" pitchFamily="2"/>
-                <a:cs typeface="Courier New" pitchFamily="2"/>
-              </a:rPr>
-              <a:t>if</a:t>
-            </a:r>
-            <a:r>
-              <a:rPr lang="sk-SK" sz="3200" b="0" i="0" u="none" strike="noStrike" kern="1200" spc="0">
-                <a:ln>
-                  <a:noFill/>
-                </a:ln>
-                <a:solidFill>
-                  <a:srgbClr val="666666"/>
-                </a:solidFill>
-                <a:latin typeface="Courier New" pitchFamily="18"/>
-                <a:ea typeface="Courier New" pitchFamily="2"/>
-                <a:cs typeface="Courier New" pitchFamily="2"/>
-              </a:rPr>
-              <a:t> CONDITION; </a:t>
-            </a:r>
-            <a:r>
-              <a:rPr lang="sk-SK" sz="3200" b="1" i="0" u="none" strike="noStrike" kern="1200" spc="0">
-                <a:ln>
-                  <a:noFill/>
-                </a:ln>
-                <a:solidFill>
-                  <a:srgbClr val="666666"/>
-                </a:solidFill>
-                <a:latin typeface="Courier New" pitchFamily="18"/>
-                <a:ea typeface="Courier New" pitchFamily="2"/>
-                <a:cs typeface="Courier New" pitchFamily="2"/>
-              </a:rPr>
-              <a:t>then</a:t>
-            </a:r>
-          </a:p>
-          <a:p>
-            <a:pPr marL="0" marR="0" lvl="0" indent="0" algn="l" rtl="0" hangingPunct="0">
-              <a:lnSpc>
-                <a:spcPct val="100000"/>
-              </a:lnSpc>
-              <a:spcBef>
-                <a:spcPts val="0"/>
-              </a:spcBef>
-              <a:spcAft>
-                <a:spcPts val="0"/>
-              </a:spcAft>
-              <a:buNone/>
-              <a:tabLst/>
-            </a:pPr>
-            <a:r>
-              <a:rPr lang="sk-SK" sz="3200" b="0" i="0" u="none" strike="noStrike" kern="1200" spc="0">
-                <a:ln>
-                  <a:noFill/>
-                </a:ln>
-                <a:solidFill>
-                  <a:srgbClr val="666666"/>
-                </a:solidFill>
-                <a:latin typeface="Courier New" pitchFamily="18"/>
-                <a:ea typeface="Courier New" pitchFamily="2"/>
-                <a:cs typeface="Courier New" pitchFamily="2"/>
-              </a:rPr>
-              <a:t>   COMMANDS</a:t>
-            </a:r>
-          </a:p>
-          <a:p>
-            <a:pPr marL="0" marR="0" lvl="0" indent="0" algn="l" rtl="0" hangingPunct="0">
-              <a:lnSpc>
-                <a:spcPct val="100000"/>
-              </a:lnSpc>
-              <a:spcBef>
-                <a:spcPts val="0"/>
-              </a:spcBef>
-              <a:spcAft>
-                <a:spcPts val="0"/>
-              </a:spcAft>
-              <a:buNone/>
-              <a:tabLst/>
-            </a:pPr>
-            <a:r>
-              <a:rPr lang="sk-SK" sz="3200" b="1" i="0" u="none" strike="noStrike" kern="1200" spc="0">
-                <a:ln>
-                  <a:noFill/>
-                </a:ln>
-                <a:solidFill>
-                  <a:srgbClr val="666666"/>
-                </a:solidFill>
-                <a:latin typeface="Courier New" pitchFamily="18"/>
-                <a:ea typeface="Courier New" pitchFamily="2"/>
-                <a:cs typeface="Courier New" pitchFamily="2"/>
-              </a:rPr>
-              <a:t>[elif</a:t>
-            </a:r>
-            <a:r>
-              <a:rPr lang="sk-SK" sz="3200" b="0" i="0" u="none" strike="noStrike" kern="1200" spc="0">
-                <a:ln>
-                  <a:noFill/>
-                </a:ln>
-                <a:solidFill>
-                  <a:srgbClr val="666666"/>
-                </a:solidFill>
-                <a:latin typeface="Courier New" pitchFamily="18"/>
-                <a:ea typeface="Courier New" pitchFamily="2"/>
-                <a:cs typeface="Courier New" pitchFamily="2"/>
-              </a:rPr>
-              <a:t> CONDITION; </a:t>
-            </a:r>
-            <a:r>
-              <a:rPr lang="sk-SK" sz="3200" b="1" i="0" u="none" strike="noStrike" kern="1200" spc="0">
-                <a:ln>
-                  <a:noFill/>
-                </a:ln>
-                <a:solidFill>
-                  <a:srgbClr val="666666"/>
-                </a:solidFill>
-                <a:latin typeface="Courier New" pitchFamily="18"/>
-                <a:ea typeface="Courier New" pitchFamily="2"/>
-                <a:cs typeface="Courier New" pitchFamily="2"/>
-              </a:rPr>
-              <a:t>then</a:t>
-            </a:r>
-          </a:p>
-          <a:p>
-            <a:pPr marL="0" marR="0" lvl="0" indent="0" algn="l" rtl="0" hangingPunct="0">
-              <a:lnSpc>
-                <a:spcPct val="100000"/>
-              </a:lnSpc>
-              <a:spcBef>
-                <a:spcPts val="0"/>
-              </a:spcBef>
-              <a:spcAft>
-                <a:spcPts val="0"/>
-              </a:spcAft>
-              <a:buNone/>
-              <a:tabLst/>
-            </a:pPr>
-            <a:r>
-              <a:rPr lang="sk-SK" sz="3200" b="0" i="0" u="none" strike="noStrike" kern="1200" spc="0">
-                <a:ln>
-                  <a:noFill/>
-                </a:ln>
-                <a:solidFill>
-                  <a:srgbClr val="666666"/>
-                </a:solidFill>
-                <a:latin typeface="Courier New" pitchFamily="18"/>
-                <a:ea typeface="Courier New" pitchFamily="2"/>
-                <a:cs typeface="Courier New" pitchFamily="2"/>
-              </a:rPr>
-              <a:t>   COMMANDS </a:t>
-            </a:r>
-            <a:r>
-              <a:rPr lang="sk-SK" sz="3200" b="1" i="0" u="none" strike="noStrike" kern="1200" spc="0">
-                <a:ln>
-                  <a:noFill/>
-                </a:ln>
-                <a:solidFill>
-                  <a:srgbClr val="666666"/>
-                </a:solidFill>
-                <a:latin typeface="Courier New" pitchFamily="18"/>
-                <a:ea typeface="Courier New" pitchFamily="2"/>
-                <a:cs typeface="Courier New" pitchFamily="2"/>
-              </a:rPr>
-              <a:t>]</a:t>
-            </a:r>
-          </a:p>
-          <a:p>
-            <a:pPr marL="0" marR="0" lvl="0" indent="0" algn="l" rtl="0" hangingPunct="0">
-              <a:lnSpc>
-                <a:spcPct val="100000"/>
-              </a:lnSpc>
-              <a:spcBef>
-                <a:spcPts val="0"/>
-              </a:spcBef>
-              <a:spcAft>
-                <a:spcPts val="0"/>
-              </a:spcAft>
-              <a:buNone/>
-              <a:tabLst/>
-            </a:pPr>
-            <a:r>
-              <a:rPr lang="sk-SK" sz="3200" b="1" i="0" u="none" strike="noStrike" kern="1200" spc="0">
-                <a:ln>
-                  <a:noFill/>
-                </a:ln>
-                <a:solidFill>
-                  <a:srgbClr val="666666"/>
-                </a:solidFill>
-                <a:latin typeface="Courier New" pitchFamily="18"/>
-                <a:ea typeface="Courier New" pitchFamily="2"/>
-                <a:cs typeface="Courier New" pitchFamily="2"/>
-              </a:rPr>
-              <a:t>[else</a:t>
-            </a:r>
-          </a:p>
-          <a:p>
-            <a:pPr marL="0" marR="0" lvl="0" indent="0" algn="l" rtl="0" hangingPunct="0">
-              <a:lnSpc>
-                <a:spcPct val="100000"/>
-              </a:lnSpc>
-              <a:spcBef>
-                <a:spcPts val="0"/>
-              </a:spcBef>
-              <a:spcAft>
-                <a:spcPts val="0"/>
-              </a:spcAft>
-              <a:buNone/>
-              <a:tabLst/>
-            </a:pPr>
-            <a:r>
-              <a:rPr lang="sk-SK" sz="3200" b="0" i="0" u="none" strike="noStrike" kern="1200" spc="0">
-                <a:ln>
-                  <a:noFill/>
-                </a:ln>
-                <a:solidFill>
-                  <a:srgbClr val="666666"/>
-                </a:solidFill>
-                <a:latin typeface="Courier New" pitchFamily="18"/>
-                <a:ea typeface="Courier New" pitchFamily="2"/>
-                <a:cs typeface="Courier New" pitchFamily="2"/>
-              </a:rPr>
-              <a:t>   COMMANDS </a:t>
-            </a:r>
-            <a:r>
-              <a:rPr lang="sk-SK" sz="3200" b="1" i="0" u="none" strike="noStrike" kern="1200" spc="0">
-                <a:ln>
-                  <a:noFill/>
-                </a:ln>
-                <a:solidFill>
-                  <a:srgbClr val="666666"/>
-                </a:solidFill>
-                <a:latin typeface="Courier New" pitchFamily="18"/>
-                <a:ea typeface="Courier New" pitchFamily="2"/>
-                <a:cs typeface="Courier New" pitchFamily="2"/>
-              </a:rPr>
-              <a:t>]</a:t>
-            </a:r>
-          </a:p>
-          <a:p>
-            <a:pPr marL="0" marR="0" lvl="0" indent="0" algn="l" rtl="0" hangingPunct="0">
-              <a:lnSpc>
-                <a:spcPct val="100000"/>
-              </a:lnSpc>
-              <a:spcBef>
-                <a:spcPts val="0"/>
-              </a:spcBef>
-              <a:spcAft>
-                <a:spcPts val="0"/>
-              </a:spcAft>
-              <a:buNone/>
-              <a:tabLst/>
-            </a:pPr>
-            <a:r>
-              <a:rPr lang="sk-SK" sz="3200" b="1" i="0" u="none" strike="noStrike" kern="1200" spc="0">
-                <a:ln>
-                  <a:noFill/>
-                </a:ln>
-                <a:solidFill>
-                  <a:srgbClr val="666666"/>
-                </a:solidFill>
-                <a:latin typeface="Courier New" pitchFamily="18"/>
-                <a:ea typeface="Courier New" pitchFamily="2"/>
-                <a:cs typeface="Courier New" pitchFamily="2"/>
-              </a:rPr>
-              <a:t>fi</a:t>
-            </a:r>
-          </a:p>
-          <a:p>
-            <a:pPr marL="0" marR="0" lvl="0" indent="0" algn="l" rtl="0" hangingPunct="0">
-              <a:lnSpc>
-                <a:spcPct val="100000"/>
-              </a:lnSpc>
-              <a:spcBef>
-                <a:spcPts val="0"/>
-              </a:spcBef>
-              <a:spcAft>
-                <a:spcPts val="0"/>
-              </a:spcAft>
-              <a:buNone/>
-              <a:tabLst/>
-            </a:pPr>
-            <a:endParaRPr lang="sk-SK" sz="3200" b="1" i="0" u="none" strike="noStrike" kern="1200" spc="0">
-              <a:ln>
-                <a:noFill/>
-              </a:ln>
-              <a:solidFill>
-                <a:srgbClr val="666666"/>
-              </a:solidFill>
-              <a:latin typeface="Courier New" pitchFamily="18"/>
-              <a:ea typeface="Courier New" pitchFamily="2"/>
-              <a:cs typeface="Courier New" pitchFamily="2"/>
-            </a:endParaRPr>
-          </a:p>
-        </p:txBody>
-      </p:sp>
-      <p:sp>
-        <p:nvSpPr>
-          <p:cNvPr id="4" name="Shape 136"/>
-          <p:cNvSpPr/>
-          <p:nvPr/>
-        </p:nvSpPr>
-        <p:spPr>
-          <a:xfrm>
-            <a:off x="0" y="5486399"/>
-            <a:ext cx="1142640" cy="1371240"/>
-          </a:xfrm>
-          <a:custGeom>
-            <a:avLst/>
-            <a:gdLst>
-              <a:gd name="f0" fmla="val 0"/>
-              <a:gd name="f1" fmla="val 21600"/>
-            </a:gdLst>
-            <a:ahLst/>
-            <a:cxnLst>
-              <a:cxn ang="3cd4">
-                <a:pos x="hc" y="t"/>
-              </a:cxn>
-              <a:cxn ang="0">
-                <a:pos x="r" y="vc"/>
-              </a:cxn>
-              <a:cxn ang="cd4">
-                <a:pos x="hc" y="b"/>
-              </a:cxn>
-              <a:cxn ang="cd2">
-                <a:pos x="l" y="vc"/>
-              </a:cxn>
-            </a:cxnLst>
-            <a:rect l="l" t="t" r="r" b="b"/>
-            <a:pathLst>
-              <a:path w="21600" h="21600">
-                <a:moveTo>
-                  <a:pt x="f0" y="f0"/>
-                </a:moveTo>
-                <a:lnTo>
-                  <a:pt x="f1" y="f0"/>
-                </a:lnTo>
-                <a:lnTo>
-                  <a:pt x="f1" y="f1"/>
-                </a:lnTo>
-                <a:lnTo>
-                  <a:pt x="f0" y="f1"/>
-                </a:lnTo>
-                <a:lnTo>
-                  <a:pt x="f0" y="f0"/>
-                </a:lnTo>
-                <a:close/>
-              </a:path>
-            </a:pathLst>
-          </a:custGeom>
-          <a:blipFill>
-            <a:blip r:embed="rId3" r:link="rId4" cstate="print"/>
-            <a:stretch>
-              <a:fillRect/>
-            </a:stretch>
-          </a:blipFill>
-          <a:ln>
-            <a:noFill/>
-            <a:prstDash val="solid"/>
-          </a:ln>
-        </p:spPr>
-        <p:txBody>
-          <a:bodyPr vert="horz" wrap="square" lIns="90000" tIns="45000" rIns="90000" bIns="45000" anchor="t" anchorCtr="0" compatLnSpc="0"/>
-          <a:lstStyle>
-            <a:defPPr lvl="0">
-              <a:buSzPct val="45000"/>
-              <a:buFont typeface="StarSymbol"/>
-              <a:buNone/>
-            </a:defPPr>
-            <a:lvl1pPr lvl="0">
-              <a:buSzPct val="45000"/>
-              <a:buFont typeface="StarSymbol"/>
-              <a:buChar char="●"/>
-            </a:lvl1pPr>
-            <a:lvl2pPr lvl="1">
-              <a:buSzPct val="45000"/>
-              <a:buFont typeface="StarSymbol"/>
-              <a:buChar char="●"/>
-            </a:lvl2pPr>
-            <a:lvl3pPr lvl="2">
-              <a:buSzPct val="45000"/>
-              <a:buFont typeface="StarSymbol"/>
-              <a:buChar char="●"/>
-            </a:lvl3pPr>
-            <a:lvl4pPr lvl="3">
-              <a:buSzPct val="45000"/>
-              <a:buFont typeface="StarSymbol"/>
-              <a:buChar char="●"/>
-            </a:lvl4pPr>
-            <a:lvl5pPr lvl="4">
-              <a:buSzPct val="45000"/>
-              <a:buFont typeface="StarSymbol"/>
-              <a:buChar char="●"/>
-            </a:lvl5pPr>
-            <a:lvl6pPr lvl="5">
-              <a:buSzPct val="45000"/>
-              <a:buFont typeface="StarSymbol"/>
-              <a:buChar char="●"/>
-            </a:lvl6pPr>
-            <a:lvl7pPr lvl="6">
-              <a:buSzPct val="45000"/>
-              <a:buFont typeface="StarSymbol"/>
-              <a:buChar char="●"/>
-            </a:lvl7pPr>
-            <a:lvl8pPr lvl="7">
-              <a:buSzPct val="45000"/>
-              <a:buFont typeface="StarSymbol"/>
-              <a:buChar char="●"/>
-            </a:lvl8pPr>
-            <a:lvl9pPr lvl="8">
-              <a:buSzPct val="45000"/>
-              <a:buFont typeface="StarSymbol"/>
-              <a:buChar char="●"/>
-            </a:lvl9pPr>
-          </a:lstStyle>
-          <a:p>
-            <a:pPr marL="0" marR="0" lvl="0" indent="0" rtl="0" hangingPunct="0">
-              <a:lnSpc>
-                <a:spcPct val="100000"/>
-              </a:lnSpc>
-              <a:spcBef>
-                <a:spcPts val="0"/>
-              </a:spcBef>
-              <a:spcAft>
-                <a:spcPts val="0"/>
-              </a:spcAft>
-              <a:buNone/>
-              <a:tabLst/>
-            </a:pPr>
-            <a:endParaRPr lang="sk-SK" sz="1800" b="0" i="0" u="none" strike="noStrike" kern="1200">
-              <a:ln>
-                <a:noFill/>
-              </a:ln>
-              <a:latin typeface="Liberation Sans" pitchFamily="18"/>
-              <a:ea typeface="DejaVu Sans" pitchFamily="2"/>
-              <a:cs typeface="DejaVu Sans" pitchFamily="2"/>
-            </a:endParaRPr>
-          </a:p>
-        </p:txBody>
-      </p:sp>
-    </p:spTree>
-  </p:cSld>
-  <p:clrMapOvr>
-    <a:masterClrMapping/>
-  </p:clrMapOvr>
-  <p:transition/>
-</p:sld>
-</file>
-
 <file path=ppt/slides/slide18.xml><?xml version="1.0" encoding="utf-8"?>
 <p:sld xmlns:a="http://schemas.openxmlformats.org/drawingml/2006/main" xmlns:r="http://schemas.openxmlformats.org/officeDocument/2006/relationships" xmlns:p="http://schemas.openxmlformats.org/presentationml/2006/main">
   <p:cSld name="Flow Control: case">
@@ -21781,64 +21739,6 @@
             </a:lvl9pPr>
           </a:lstStyle>
           <a:p>
-            <a:pPr hangingPunct="0">
-              <a:buNone/>
-            </a:pPr>
-            <a:r>
-              <a:rPr lang="sk-SK" sz="2400" b="0" i="0" u="none" strike="noStrike" kern="1200" spc="0">
-                <a:ln>
-                  <a:noFill/>
-                </a:ln>
-                <a:solidFill>
-                  <a:srgbClr val="666666"/>
-                </a:solidFill>
-                <a:latin typeface="Courier New"/>
-                <a:ea typeface="Courier New" pitchFamily="2"/>
-                <a:cs typeface="Courier New"/>
-              </a:rPr>
-              <a:t>$ </a:t>
-            </a:r>
-            <a:r>
-              <a:rPr lang="sk-SK" sz="2400" b="1" i="0" u="none" strike="noStrike" kern="1200" spc="0" err="1">
-                <a:ln>
-                  <a:noFill/>
-                </a:ln>
-                <a:solidFill>
-                  <a:srgbClr val="666666"/>
-                </a:solidFill>
-                <a:latin typeface="Courier New"/>
-                <a:ea typeface="Courier New" pitchFamily="2"/>
-                <a:cs typeface="Courier New"/>
-              </a:rPr>
-              <a:t>cat</a:t>
-            </a:r>
-            <a:r>
-              <a:rPr lang="sk-SK" sz="2400" b="1">
-                <a:solidFill>
-                  <a:srgbClr val="666666"/>
-                </a:solidFill>
-                <a:latin typeface="Courier New"/>
-                <a:ea typeface="Courier New" pitchFamily="2"/>
-                <a:cs typeface="Courier New"/>
-              </a:rPr>
-              <a:t> pr11-3</a:t>
-            </a:r>
-            <a:r>
-              <a:rPr lang="sk-SK" sz="2400" b="1" i="0" u="none" strike="noStrike" kern="1200" spc="0">
-                <a:ln>
-                  <a:noFill/>
-                </a:ln>
-                <a:solidFill>
-                  <a:srgbClr val="666666"/>
-                </a:solidFill>
-                <a:latin typeface="Courier New"/>
-                <a:ea typeface="Courier New" pitchFamily="2"/>
-                <a:cs typeface="Courier New"/>
-              </a:rPr>
-              <a:t>.sh</a:t>
-            </a:r>
-          </a:p>
-          <a:p>
             <a:pPr marL="0" marR="0" lvl="0" indent="0" algn="l" rtl="0" hangingPunct="0">
               <a:lnSpc>
                 <a:spcPct val="100000"/>
@@ -21853,7 +21753,7 @@
               <a:tabLst/>
             </a:pPr>
             <a:r>
-              <a:rPr lang="sk-SK" sz="2400" b="0" i="0" u="none" strike="noStrike" kern="1200" spc="0">
+              <a:rPr lang="sk-SK" sz="2400" b="0" i="0" u="none" strike="noStrike" kern="1200" spc="0" dirty="0">
                 <a:ln>
                   <a:noFill/>
                 </a:ln>
@@ -21864,8 +21764,33 @@
                 <a:ea typeface="Courier New" pitchFamily="2"/>
                 <a:cs typeface="Courier New"/>
               </a:rPr>
-              <a:t>#!/bin/bash</a:t>
-            </a:r>
+              <a:t>#!/bin/</a:t>
+            </a:r>
+            <a:r>
+              <a:rPr lang="sk-SK" sz="2400" b="0" i="0" u="none" strike="noStrike" kern="1200" spc="0" dirty="0" err="1">
+                <a:ln>
+                  <a:noFill/>
+                </a:ln>
+                <a:solidFill>
+                  <a:srgbClr val="666666"/>
+                </a:solidFill>
+                <a:latin typeface="Courier New"/>
+                <a:ea typeface="Courier New" pitchFamily="2"/>
+                <a:cs typeface="Courier New"/>
+              </a:rPr>
+              <a:t>bash</a:t>
+            </a:r>
+            <a:endParaRPr lang="sk-SK" sz="2400" b="0" i="0" u="none" strike="noStrike" kern="1200" spc="0" dirty="0">
+              <a:ln>
+                <a:noFill/>
+              </a:ln>
+              <a:solidFill>
+                <a:srgbClr val="666666"/>
+              </a:solidFill>
+              <a:latin typeface="Courier New"/>
+              <a:ea typeface="Courier New" pitchFamily="2"/>
+              <a:cs typeface="Courier New"/>
+            </a:endParaRPr>
           </a:p>
           <a:p>
             <a:pPr marL="0" marR="0" lvl="0" indent="0" algn="l" rtl="0" hangingPunct="0">
@@ -21882,7 +21807,7 @@
               <a:tabLst/>
             </a:pPr>
             <a:r>
-              <a:rPr lang="sk-SK" sz="2400" b="0" i="0" u="none" strike="noStrike" kern="1200" spc="0">
+              <a:rPr lang="sk-SK" sz="2400" b="0" i="0" u="none" strike="noStrike" kern="1200" spc="0" dirty="0">
                 <a:ln>
                   <a:noFill/>
                 </a:ln>
@@ -21896,7 +21821,7 @@
               <a:t>echo "</a:t>
             </a:r>
             <a:r>
-              <a:rPr lang="sk-SK" sz="2400" b="0" i="0" u="none" strike="noStrike" kern="1200" spc="0" err="1">
+              <a:rPr lang="sk-SK" sz="2400" b="0" i="0" u="none" strike="noStrike" kern="1200" spc="0" dirty="0" err="1">
                 <a:ln>
                   <a:noFill/>
                 </a:ln>
@@ -21910,7 +21835,7 @@
               <a:t>The</a:t>
             </a:r>
             <a:r>
-              <a:rPr lang="sk-SK" sz="2400" b="0" i="0" u="none" strike="noStrike" kern="1200" spc="0">
+              <a:rPr lang="sk-SK" sz="2400" b="0" i="0" u="none" strike="noStrike" kern="1200" spc="0" dirty="0">
                 <a:ln>
                   <a:noFill/>
                 </a:ln>
@@ -21924,7 +21849,7 @@
               <a:t> </a:t>
             </a:r>
             <a:r>
-              <a:rPr lang="sk-SK" sz="2400" b="0" i="0" u="none" strike="noStrike" kern="1200" spc="0" err="1">
+              <a:rPr lang="sk-SK" sz="2400" b="0" i="0" u="none" strike="noStrike" kern="1200" spc="0" dirty="0" err="1">
                 <a:ln>
                   <a:noFill/>
                 </a:ln>
@@ -21938,7 +21863,7 @@
               <a:t>name</a:t>
             </a:r>
             <a:r>
-              <a:rPr lang="sk-SK" sz="2400" b="0" i="0" u="none" strike="noStrike" kern="1200" spc="0">
+              <a:rPr lang="sk-SK" sz="2400" b="0" i="0" u="none" strike="noStrike" kern="1200" spc="0" dirty="0">
                 <a:ln>
                   <a:noFill/>
                 </a:ln>
@@ -21952,7 +21877,7 @@
               <a:t> of </a:t>
             </a:r>
             <a:r>
-              <a:rPr lang="sk-SK" sz="2400" b="0" i="0" u="none" strike="noStrike" kern="1200" spc="0" err="1">
+              <a:rPr lang="sk-SK" sz="2400" b="0" i="0" u="none" strike="noStrike" kern="1200" spc="0" dirty="0" err="1">
                 <a:ln>
                   <a:noFill/>
                 </a:ln>
@@ -21966,7 +21891,7 @@
               <a:t>this</a:t>
             </a:r>
             <a:r>
-              <a:rPr lang="sk-SK" sz="2400" b="0" i="0" u="none" strike="noStrike" kern="1200" spc="0">
+              <a:rPr lang="sk-SK" sz="2400" b="0" i="0" u="none" strike="noStrike" kern="1200" spc="0" dirty="0">
                 <a:ln>
                   <a:noFill/>
                 </a:ln>
@@ -21980,7 +21905,7 @@
               <a:t> </a:t>
             </a:r>
             <a:r>
-              <a:rPr lang="sk-SK" sz="2400" b="0" i="0" u="none" strike="noStrike" kern="1200" spc="0" err="1">
+              <a:rPr lang="sk-SK" sz="2400" b="0" i="0" u="none" strike="noStrike" kern="1200" spc="0" dirty="0" err="1">
                 <a:ln>
                   <a:noFill/>
                 </a:ln>
@@ -21994,7 +21919,7 @@
               <a:t>process</a:t>
             </a:r>
             <a:r>
-              <a:rPr lang="sk-SK" sz="2400" b="0" i="0" u="none" strike="noStrike" kern="1200" spc="0">
+              <a:rPr lang="sk-SK" sz="2400" b="0" i="0" u="none" strike="noStrike" kern="1200" spc="0" dirty="0">
                 <a:ln>
                   <a:noFill/>
                 </a:ln>
@@ -22008,7 +21933,7 @@
               <a:t> </a:t>
             </a:r>
             <a:r>
-              <a:rPr lang="sk-SK" sz="2400" b="0" i="0" u="none" strike="noStrike" kern="1200" spc="0" err="1">
+              <a:rPr lang="sk-SK" sz="2400" b="0" i="0" u="none" strike="noStrike" kern="1200" spc="0" dirty="0" err="1">
                 <a:ln>
                   <a:noFill/>
                 </a:ln>
@@ -22022,7 +21947,7 @@
               <a:t>is</a:t>
             </a:r>
             <a:r>
-              <a:rPr lang="sk-SK" sz="2400" b="0" i="0" u="none" strike="noStrike" kern="1200" spc="0">
+              <a:rPr lang="sk-SK" sz="2400" b="0" i="0" u="none" strike="noStrike" kern="1200" spc="0" dirty="0">
                 <a:ln>
                   <a:noFill/>
                 </a:ln>
@@ -22036,7 +21961,7 @@
               <a:t> $0"</a:t>
             </a:r>
             <a:br>
-              <a:rPr lang="sk-SK" sz="2400" b="0" i="0" u="none" strike="noStrike" kern="1200" spc="0">
+              <a:rPr lang="sk-SK" sz="2400" b="0" i="0" u="none" strike="noStrike" kern="1200" spc="0" dirty="0">
                 <a:ln>
                   <a:noFill/>
                 </a:ln>
@@ -22046,7 +21971,7 @@
               </a:rPr>
             </a:br>
             <a:r>
-              <a:rPr lang="sk-SK" sz="2400" b="0" i="0" u="none" strike="noStrike" kern="1200" spc="0">
+              <a:rPr lang="sk-SK" sz="2400" b="0" i="0" u="none" strike="noStrike" kern="1200" spc="0" dirty="0">
                 <a:ln>
                   <a:noFill/>
                 </a:ln>
@@ -22057,10 +21982,10 @@
                 <a:ea typeface="Courier New" pitchFamily="2"/>
                 <a:cs typeface="Courier New"/>
               </a:rPr>
-              <a:t>echo -e "</a:t>
-            </a:r>
-            <a:r>
-              <a:rPr lang="sk-SK" sz="2400" b="0" i="0" u="none" strike="noStrike" kern="1200" spc="0" err="1">
+              <a:t>echo -</a:t>
+            </a:r>
+            <a:r>
+              <a:rPr lang="sk-SK" sz="2400" b="0" i="0" u="none" strike="noStrike" kern="1200" spc="0" dirty="0" err="1">
                 <a:ln>
                   <a:noFill/>
                 </a:ln>
@@ -22071,10 +21996,38 @@
                 <a:ea typeface="Courier New" pitchFamily="2"/>
                 <a:cs typeface="Courier New"/>
               </a:rPr>
+              <a:t>e</a:t>
+            </a:r>
+            <a:r>
+              <a:rPr lang="sk-SK" sz="2400" b="0" i="0" u="none" strike="noStrike" kern="1200" spc="0" dirty="0">
+                <a:ln>
+                  <a:noFill/>
+                </a:ln>
+                <a:solidFill>
+                  <a:srgbClr val="666666"/>
+                </a:solidFill>
+                <a:latin typeface="Courier New"/>
+                <a:ea typeface="Courier New" pitchFamily="2"/>
+                <a:cs typeface="Courier New"/>
+              </a:rPr>
+              <a:t> "</a:t>
+            </a:r>
+            <a:r>
+              <a:rPr lang="sk-SK" sz="2400" b="0" i="0" u="none" strike="noStrike" kern="1200" spc="0" dirty="0" err="1">
+                <a:ln>
+                  <a:noFill/>
+                </a:ln>
+                <a:solidFill>
+                  <a:srgbClr val="666666"/>
+                </a:solidFill>
+                <a:latin typeface="Courier New"/>
+                <a:ea typeface="Courier New" pitchFamily="2"/>
+                <a:cs typeface="Courier New"/>
+              </a:rPr>
               <a:t>You</a:t>
             </a:r>
             <a:r>
-              <a:rPr lang="sk-SK" sz="2400" b="0" i="0" u="none" strike="noStrike" kern="1200" spc="0">
+              <a:rPr lang="sk-SK" sz="2400" b="0" i="0" u="none" strike="noStrike" kern="1200" spc="0" dirty="0">
                 <a:ln>
                   <a:noFill/>
                 </a:ln>
@@ -22088,7 +22041,7 @@
               <a:t> </a:t>
             </a:r>
             <a:r>
-              <a:rPr lang="sk-SK" sz="2400" b="0" i="0" u="none" strike="noStrike" kern="1200" spc="0" err="1">
+              <a:rPr lang="sk-SK" sz="2400" b="0" i="0" u="none" strike="noStrike" kern="1200" spc="0" dirty="0" err="1">
                 <a:ln>
                   <a:noFill/>
                 </a:ln>
@@ -22102,7 +22055,7 @@
               <a:t>have</a:t>
             </a:r>
             <a:r>
-              <a:rPr lang="sk-SK" sz="2400" b="0" i="0" u="none" strike="noStrike" kern="1200" spc="0">
+              <a:rPr lang="sk-SK" sz="2400" b="0" i="0" u="none" strike="noStrike" kern="1200" spc="0" dirty="0">
                 <a:ln>
                   <a:noFill/>
                 </a:ln>
@@ -22116,7 +22069,7 @@
               <a:t> </a:t>
             </a:r>
             <a:r>
-              <a:rPr lang="sk-SK" sz="2400" b="0" i="0" u="none" strike="noStrike" kern="1200" spc="0" err="1">
+              <a:rPr lang="sk-SK" sz="2400" b="0" i="0" u="none" strike="noStrike" kern="1200" spc="0" dirty="0" err="1">
                 <a:ln>
                   <a:noFill/>
                 </a:ln>
@@ -22130,7 +22083,7 @@
               <a:t>passed</a:t>
             </a:r>
             <a:r>
-              <a:rPr lang="sk-SK" sz="2400" b="0" i="0" u="none" strike="noStrike" kern="1200" spc="0">
+              <a:rPr lang="sk-SK" sz="2400" b="0" i="0" u="none" strike="noStrike" kern="1200" spc="0" dirty="0">
                 <a:ln>
                   <a:noFill/>
                 </a:ln>
@@ -22144,7 +22097,7 @@
               <a:t> $# </a:t>
             </a:r>
             <a:r>
-              <a:rPr lang="sk-SK" sz="2400" b="0" i="0" u="none" strike="noStrike" kern="1200" spc="0" err="1">
+              <a:rPr lang="sk-SK" sz="2400" b="0" i="0" u="none" strike="noStrike" kern="1200" spc="0" dirty="0" err="1">
                 <a:ln>
                   <a:noFill/>
                 </a:ln>
@@ -22158,7 +22111,7 @@
               <a:t>parameters</a:t>
             </a:r>
             <a:r>
-              <a:rPr lang="sk-SK" sz="2400" b="0" i="0" u="none" strike="noStrike" kern="1200" spc="0">
+              <a:rPr lang="sk-SK" sz="2400" b="0" i="0" u="none" strike="noStrike" kern="1200" spc="0" dirty="0">
                 <a:ln>
                   <a:noFill/>
                 </a:ln>
@@ -22172,7 +22125,7 @@
               <a:t>. </a:t>
             </a:r>
             <a:r>
-              <a:rPr lang="sk-SK" sz="2400" b="0" i="0" u="none" strike="noStrike" kern="1200" spc="0" err="1">
+              <a:rPr lang="sk-SK" sz="2400" b="0" i="0" u="none" strike="noStrike" kern="1200" spc="0" dirty="0" err="1">
                 <a:ln>
                   <a:noFill/>
                 </a:ln>
@@ -22186,7 +22139,7 @@
               <a:t>They</a:t>
             </a:r>
             <a:r>
-              <a:rPr lang="sk-SK" sz="2400" b="0" i="0" u="none" strike="noStrike" kern="1200" spc="0">
+              <a:rPr lang="sk-SK" sz="2400" b="0" i="0" u="none" strike="noStrike" kern="1200" spc="0" dirty="0">
                 <a:ln>
                   <a:noFill/>
                 </a:ln>
@@ -22200,7 +22153,7 @@
               <a:t> are</a:t>
             </a:r>
             <a:r>
-              <a:rPr lang="sk-SK" sz="2400">
+              <a:rPr lang="sk-SK" sz="2400" dirty="0">
                 <a:solidFill>
                   <a:srgbClr val="666666"/>
                 </a:solidFill>
@@ -22210,7 +22163,7 @@
               </a:rPr>
               <a:t>:$*"</a:t>
             </a:r>
-            <a:endParaRPr lang="sk-SK" sz="2400" b="0" i="0" u="none" strike="noStrike" kern="1200" spc="0">
+            <a:endParaRPr lang="sk-SK" sz="2400" b="0" i="0" u="none" strike="noStrike" kern="1200" spc="0" dirty="0">
               <a:ln>
                 <a:noFill/>
               </a:ln>
@@ -22237,7 +22190,7 @@
               <a:tabLst/>
             </a:pPr>
             <a:r>
-              <a:rPr lang="sk-SK" sz="2400" b="0" i="0" u="none" strike="noStrike" kern="1200" spc="0">
+              <a:rPr lang="sk-SK" sz="2400" b="0" i="0" u="none" strike="noStrike" kern="1200" spc="0" dirty="0">
                 <a:ln>
                   <a:noFill/>
                 </a:ln>
@@ -22251,7 +22204,7 @@
               <a:t>echo "</a:t>
             </a:r>
             <a:r>
-              <a:rPr lang="sk-SK" sz="2400" b="0" i="0" u="none" strike="noStrike" kern="1200" spc="0" err="1">
+              <a:rPr lang="sk-SK" sz="2400" b="0" i="0" u="none" strike="noStrike" kern="1200" spc="0" dirty="0" err="1">
                 <a:ln>
                   <a:noFill/>
                 </a:ln>
@@ -22265,7 +22218,7 @@
               <a:t>First</a:t>
             </a:r>
             <a:r>
-              <a:rPr lang="sk-SK" sz="2400" b="0" i="0" u="none" strike="noStrike" kern="1200" spc="0">
+              <a:rPr lang="sk-SK" sz="2400" b="0" i="0" u="none" strike="noStrike" kern="1200" spc="0" dirty="0">
                 <a:ln>
                   <a:noFill/>
                 </a:ln>
@@ -22279,7 +22232,7 @@
               <a:t> </a:t>
             </a:r>
             <a:r>
-              <a:rPr lang="sk-SK" sz="2400" b="0" i="0" u="none" strike="noStrike" kern="1200" spc="0" err="1">
+              <a:rPr lang="sk-SK" sz="2400" b="0" i="0" u="none" strike="noStrike" kern="1200" spc="0" dirty="0" err="1">
                 <a:ln>
                   <a:noFill/>
                 </a:ln>
@@ -22293,7 +22246,7 @@
               <a:t>is</a:t>
             </a:r>
             <a:r>
-              <a:rPr lang="sk-SK" sz="2400" b="0" i="0" u="none" strike="noStrike" kern="1200" spc="0">
+              <a:rPr lang="sk-SK" sz="2400" b="0" i="0" u="none" strike="noStrike" kern="1200" spc="0" dirty="0">
                 <a:ln>
                   <a:noFill/>
                 </a:ln>
@@ -22321,7 +22274,7 @@
               <a:buNone/>
               <a:tabLst/>
             </a:pPr>
-            <a:endParaRPr lang="sk-SK" sz="2400" b="0" i="0" u="none" strike="noStrike" kern="1200" spc="0">
+            <a:endParaRPr lang="sk-SK" sz="2400" b="0" i="0" u="none" strike="noStrike" kern="1200" spc="0" dirty="0">
               <a:ln>
                 <a:noFill/>
               </a:ln>
@@ -22347,7 +22300,7 @@
               <a:buNone/>
               <a:tabLst/>
             </a:pPr>
-            <a:endParaRPr lang="sk-SK" sz="2400">
+            <a:endParaRPr lang="sk-SK" sz="2400" dirty="0">
               <a:solidFill>
                 <a:srgbClr val="666666"/>
               </a:solidFill>
@@ -22371,7 +22324,7 @@
               <a:tabLst/>
             </a:pPr>
             <a:r>
-              <a:rPr lang="sk-SK" sz="2400" b="0" i="0" u="none" strike="noStrike" kern="1200" spc="0">
+              <a:rPr lang="sk-SK" sz="2400" b="0" i="0" u="none" strike="noStrike" kern="1200" spc="0" dirty="0">
                 <a:ln>
                   <a:noFill/>
                 </a:ln>
@@ -22385,7 +22338,7 @@
               <a:t>$ </a:t>
             </a:r>
             <a:r>
-              <a:rPr lang="sk-SK" sz="2400" b="1">
+              <a:rPr lang="sk-SK" sz="2400" b="1" dirty="0">
                 <a:solidFill>
                   <a:srgbClr val="666666"/>
                 </a:solidFill>
@@ -22396,7 +22349,7 @@
               <a:t>./pr11-3.</a:t>
             </a:r>
             <a:r>
-              <a:rPr lang="sk-SK" sz="2400" b="1" i="0" u="none" strike="noStrike" kern="1200" spc="0">
+              <a:rPr lang="sk-SK" sz="2400" b="1" i="0" u="none" strike="noStrike" kern="1200" spc="0" dirty="0">
                 <a:ln>
                   <a:noFill/>
                 </a:ln>
@@ -22425,7 +22378,7 @@
               <a:tabLst/>
             </a:pPr>
             <a:r>
-              <a:rPr lang="sk-SK" sz="2400" b="0" i="0" u="none" strike="noStrike" kern="1200" spc="0" err="1">
+              <a:rPr lang="sk-SK" sz="2400" b="0" i="0" u="none" strike="noStrike" kern="1200" spc="0" dirty="0" err="1">
                 <a:ln>
                   <a:noFill/>
                 </a:ln>
@@ -22439,7 +22392,7 @@
               <a:t>The</a:t>
             </a:r>
             <a:r>
-              <a:rPr lang="sk-SK" sz="2400" b="0" i="0" u="none" strike="noStrike" kern="1200" spc="0">
+              <a:rPr lang="sk-SK" sz="2400" b="0" i="0" u="none" strike="noStrike" kern="1200" spc="0" dirty="0">
                 <a:ln>
                   <a:noFill/>
                 </a:ln>
@@ -22453,7 +22406,7 @@
               <a:t> </a:t>
             </a:r>
             <a:r>
-              <a:rPr lang="sk-SK" sz="2400" b="0" i="0" u="none" strike="noStrike" kern="1200" spc="0" err="1">
+              <a:rPr lang="sk-SK" sz="2400" b="0" i="0" u="none" strike="noStrike" kern="1200" spc="0" dirty="0" err="1">
                 <a:ln>
                   <a:noFill/>
                 </a:ln>
@@ -22467,7 +22420,7 @@
               <a:t>name</a:t>
             </a:r>
             <a:r>
-              <a:rPr lang="sk-SK" sz="2400" b="0" i="0" u="none" strike="noStrike" kern="1200" spc="0">
+              <a:rPr lang="sk-SK" sz="2400" b="0" i="0" u="none" strike="noStrike" kern="1200" spc="0" dirty="0">
                 <a:ln>
                   <a:noFill/>
                 </a:ln>
@@ -22481,7 +22434,7 @@
               <a:t> of </a:t>
             </a:r>
             <a:r>
-              <a:rPr lang="sk-SK" sz="2400" b="0" i="0" u="none" strike="noStrike" kern="1200" spc="0" err="1">
+              <a:rPr lang="sk-SK" sz="2400" b="0" i="0" u="none" strike="noStrike" kern="1200" spc="0" dirty="0" err="1">
                 <a:ln>
                   <a:noFill/>
                 </a:ln>
@@ -22495,7 +22448,7 @@
               <a:t>this</a:t>
             </a:r>
             <a:r>
-              <a:rPr lang="sk-SK" sz="2400" b="0" i="0" u="none" strike="noStrike" kern="1200" spc="0">
+              <a:rPr lang="sk-SK" sz="2400" b="0" i="0" u="none" strike="noStrike" kern="1200" spc="0" dirty="0">
                 <a:ln>
                   <a:noFill/>
                 </a:ln>
@@ -22509,7 +22462,7 @@
               <a:t> </a:t>
             </a:r>
             <a:r>
-              <a:rPr lang="sk-SK" sz="2400" b="0" i="0" u="none" strike="noStrike" kern="1200" spc="0" err="1">
+              <a:rPr lang="sk-SK" sz="2400" b="0" i="0" u="none" strike="noStrike" kern="1200" spc="0" dirty="0" err="1">
                 <a:ln>
                   <a:noFill/>
                 </a:ln>
@@ -22523,7 +22476,7 @@
               <a:t>process</a:t>
             </a:r>
             <a:r>
-              <a:rPr lang="sk-SK" sz="2400" b="0" i="0" u="none" strike="noStrike" kern="1200" spc="0">
+              <a:rPr lang="sk-SK" sz="2400" b="0" i="0" u="none" strike="noStrike" kern="1200" spc="0" dirty="0">
                 <a:ln>
                   <a:noFill/>
                 </a:ln>
@@ -22537,7 +22490,7 @@
               <a:t> </a:t>
             </a:r>
             <a:r>
-              <a:rPr lang="sk-SK" sz="2400" b="0" i="0" u="none" strike="noStrike" kern="1200" spc="0" err="1">
+              <a:rPr lang="sk-SK" sz="2400" b="0" i="0" u="none" strike="noStrike" kern="1200" spc="0" dirty="0" err="1">
                 <a:ln>
                   <a:noFill/>
                 </a:ln>
@@ -22551,7 +22504,7 @@
               <a:t>is</a:t>
             </a:r>
             <a:r>
-              <a:rPr lang="sk-SK" sz="2400" b="0" i="0" u="none" strike="noStrike" kern="1200" spc="0">
+              <a:rPr lang="sk-SK" sz="2400" b="0" i="0" u="none" strike="noStrike" kern="1200" spc="0" dirty="0">
                 <a:ln>
                   <a:noFill/>
                 </a:ln>
@@ -22580,7 +22533,7 @@
               <a:tabLst/>
             </a:pPr>
             <a:r>
-              <a:rPr lang="sk-SK" sz="2400" b="0" i="0" u="none" strike="noStrike" kern="1200" spc="0" err="1">
+              <a:rPr lang="sk-SK" sz="2400" b="0" i="0" u="none" strike="noStrike" kern="1200" spc="0" dirty="0" err="1">
                 <a:ln>
                   <a:noFill/>
                 </a:ln>
@@ -22594,7 +22547,7 @@
               <a:t>You</a:t>
             </a:r>
             <a:r>
-              <a:rPr lang="sk-SK" sz="2400" b="0" i="0" u="none" strike="noStrike" kern="1200" spc="0">
+              <a:rPr lang="sk-SK" sz="2400" b="0" i="0" u="none" strike="noStrike" kern="1200" spc="0" dirty="0">
                 <a:ln>
                   <a:noFill/>
                 </a:ln>
@@ -22608,7 +22561,7 @@
               <a:t> </a:t>
             </a:r>
             <a:r>
-              <a:rPr lang="sk-SK" sz="2400" b="0" i="0" u="none" strike="noStrike" kern="1200" spc="0" err="1">
+              <a:rPr lang="sk-SK" sz="2400" b="0" i="0" u="none" strike="noStrike" kern="1200" spc="0" dirty="0" err="1">
                 <a:ln>
                   <a:noFill/>
                 </a:ln>
@@ -22622,7 +22575,7 @@
               <a:t>have</a:t>
             </a:r>
             <a:r>
-              <a:rPr lang="sk-SK" sz="2400" b="0" i="0" u="none" strike="noStrike" kern="1200" spc="0">
+              <a:rPr lang="sk-SK" sz="2400" b="0" i="0" u="none" strike="noStrike" kern="1200" spc="0" dirty="0">
                 <a:ln>
                   <a:noFill/>
                 </a:ln>
@@ -22636,7 +22589,7 @@
               <a:t> </a:t>
             </a:r>
             <a:r>
-              <a:rPr lang="sk-SK" sz="2400" b="0" i="0" u="none" strike="noStrike" kern="1200" spc="0" err="1">
+              <a:rPr lang="sk-SK" sz="2400" b="0" i="0" u="none" strike="noStrike" kern="1200" spc="0" dirty="0" err="1">
                 <a:ln>
                   <a:noFill/>
                 </a:ln>
@@ -22650,7 +22603,7 @@
               <a:t>passed</a:t>
             </a:r>
             <a:r>
-              <a:rPr lang="sk-SK" sz="2400" b="0" i="0" u="none" strike="noStrike" kern="1200" spc="0">
+              <a:rPr lang="sk-SK" sz="2400" b="0" i="0" u="none" strike="noStrike" kern="1200" spc="0" dirty="0">
                 <a:ln>
                   <a:noFill/>
                 </a:ln>
@@ -22664,7 +22617,7 @@
               <a:t> 4 </a:t>
             </a:r>
             <a:r>
-              <a:rPr lang="sk-SK" sz="2400" b="0" i="0" u="none" strike="noStrike" kern="1200" spc="0" err="1">
+              <a:rPr lang="sk-SK" sz="2400" b="0" i="0" u="none" strike="noStrike" kern="1200" spc="0" dirty="0" err="1">
                 <a:ln>
                   <a:noFill/>
                 </a:ln>
@@ -22678,7 +22631,7 @@
               <a:t>parameters</a:t>
             </a:r>
             <a:r>
-              <a:rPr lang="sk-SK" sz="2400" b="0" i="0" u="none" strike="noStrike" kern="1200" spc="0">
+              <a:rPr lang="sk-SK" sz="2400" b="0" i="0" u="none" strike="noStrike" kern="1200" spc="0" dirty="0">
                 <a:ln>
                   <a:noFill/>
                 </a:ln>
@@ -22692,7 +22645,7 @@
               <a:t>. </a:t>
             </a:r>
             <a:r>
-              <a:rPr lang="sk-SK" sz="2400" b="0" i="0" u="none" strike="noStrike" kern="1200" spc="0" err="1">
+              <a:rPr lang="sk-SK" sz="2400" b="0" i="0" u="none" strike="noStrike" kern="1200" spc="0" dirty="0" err="1">
                 <a:ln>
                   <a:noFill/>
                 </a:ln>
@@ -22706,7 +22659,7 @@
               <a:t>They</a:t>
             </a:r>
             <a:r>
-              <a:rPr lang="sk-SK" sz="2400" b="0" i="0" u="none" strike="noStrike" kern="1200" spc="0">
+              <a:rPr lang="sk-SK" sz="2400" b="0" i="0" u="none" strike="noStrike" kern="1200" spc="0" dirty="0">
                 <a:ln>
                   <a:noFill/>
                 </a:ln>
@@ -22720,7 +22673,7 @@
               <a:t> </a:t>
             </a:r>
             <a:r>
-              <a:rPr lang="sk-SK" sz="2400" b="0" i="0" u="none" strike="noStrike" kern="1200" spc="0" err="1">
+              <a:rPr lang="sk-SK" sz="2400" b="0" i="0" u="none" strike="noStrike" kern="1200" spc="0" dirty="0" err="1">
                 <a:ln>
                   <a:noFill/>
                 </a:ln>
@@ -22734,7 +22687,7 @@
               <a:t>are:a</a:t>
             </a:r>
             <a:r>
-              <a:rPr lang="sk-SK" sz="2400" b="0" i="0" u="none" strike="noStrike" kern="1200" spc="0">
+              <a:rPr lang="sk-SK" sz="2400" b="0" i="0" u="none" strike="noStrike" kern="1200" spc="0" dirty="0">
                 <a:ln>
                   <a:noFill/>
                 </a:ln>
@@ -22763,7 +22716,7 @@
               <a:tabLst/>
             </a:pPr>
             <a:r>
-              <a:rPr lang="sk-SK" sz="2400" b="0" i="0" u="none" strike="noStrike" kern="1200" spc="0" err="1">
+              <a:rPr lang="sk-SK" sz="2400" b="0" i="0" u="none" strike="noStrike" kern="1200" spc="0" dirty="0" err="1">
                 <a:ln>
                   <a:noFill/>
                 </a:ln>
@@ -22777,7 +22730,7 @@
               <a:t>First</a:t>
             </a:r>
             <a:r>
-              <a:rPr lang="sk-SK" sz="2400" b="0" i="0" u="none" strike="noStrike" kern="1200" spc="0">
+              <a:rPr lang="sk-SK" sz="2400" b="0" i="0" u="none" strike="noStrike" kern="1200" spc="0" dirty="0">
                 <a:ln>
                   <a:noFill/>
                 </a:ln>
@@ -22791,7 +22744,7 @@
               <a:t> </a:t>
             </a:r>
             <a:r>
-              <a:rPr lang="sk-SK" sz="2400" b="0" i="0" u="none" strike="noStrike" kern="1200" spc="0" err="1">
+              <a:rPr lang="sk-SK" sz="2400" b="0" i="0" u="none" strike="noStrike" kern="1200" spc="0" dirty="0" err="1">
                 <a:ln>
                   <a:noFill/>
                 </a:ln>
@@ -22805,7 +22758,7 @@
               <a:t>is</a:t>
             </a:r>
             <a:r>
-              <a:rPr lang="sk-SK" sz="2400" b="0" i="0" u="none" strike="noStrike" kern="1200" spc="0">
+              <a:rPr lang="sk-SK" sz="2400" b="0" i="0" u="none" strike="noStrike" kern="1200" spc="0" dirty="0">
                 <a:ln>
                   <a:noFill/>
                 </a:ln>
@@ -22818,7 +22771,7 @@
               </a:rPr>
               <a:t> a</a:t>
             </a:r>
-            <a:endParaRPr lang="sk-SK" sz="2400" b="0" i="0" u="none" strike="noStrike" kern="1200" spc="0">
+            <a:endParaRPr lang="sk-SK" sz="2400" b="0" i="0" u="none" strike="noStrike" kern="1200" spc="0" dirty="0">
               <a:ln>
                 <a:noFill/>
               </a:ln>
